--- a/Course content/Slides/Topic 0 - Course presentation.pptx
+++ b/Course content/Slides/Topic 0 - Course presentation.pptx
@@ -280,7 +280,7 @@
           <a:p>
             <a:fld id="{A7DB5662-7327-465C-9A70-AD96B7A8D67A}" type="datetimeFigureOut">
               <a:rPr lang="en-US" smtClean="0"/>
-              <a:t>10/4/2022</a:t>
+              <a:t>10/18/2022</a:t>
             </a:fld>
             <a:endParaRPr lang="en-US"/>
           </a:p>
@@ -478,7 +478,7 @@
           <a:p>
             <a:fld id="{A7DB5662-7327-465C-9A70-AD96B7A8D67A}" type="datetimeFigureOut">
               <a:rPr lang="en-US" smtClean="0"/>
-              <a:t>10/4/2022</a:t>
+              <a:t>10/18/2022</a:t>
             </a:fld>
             <a:endParaRPr lang="en-US"/>
           </a:p>
@@ -686,7 +686,7 @@
           <a:p>
             <a:fld id="{A7DB5662-7327-465C-9A70-AD96B7A8D67A}" type="datetimeFigureOut">
               <a:rPr lang="en-US" smtClean="0"/>
-              <a:t>10/4/2022</a:t>
+              <a:t>10/18/2022</a:t>
             </a:fld>
             <a:endParaRPr lang="en-US"/>
           </a:p>
@@ -884,7 +884,7 @@
           <a:p>
             <a:fld id="{A7DB5662-7327-465C-9A70-AD96B7A8D67A}" type="datetimeFigureOut">
               <a:rPr lang="en-US" smtClean="0"/>
-              <a:t>10/4/2022</a:t>
+              <a:t>10/18/2022</a:t>
             </a:fld>
             <a:endParaRPr lang="en-US"/>
           </a:p>
@@ -1159,7 +1159,7 @@
           <a:p>
             <a:fld id="{A7DB5662-7327-465C-9A70-AD96B7A8D67A}" type="datetimeFigureOut">
               <a:rPr lang="en-US" smtClean="0"/>
-              <a:t>10/4/2022</a:t>
+              <a:t>10/18/2022</a:t>
             </a:fld>
             <a:endParaRPr lang="en-US"/>
           </a:p>
@@ -1424,7 +1424,7 @@
           <a:p>
             <a:fld id="{A7DB5662-7327-465C-9A70-AD96B7A8D67A}" type="datetimeFigureOut">
               <a:rPr lang="en-US" smtClean="0"/>
-              <a:t>10/4/2022</a:t>
+              <a:t>10/18/2022</a:t>
             </a:fld>
             <a:endParaRPr lang="en-US"/>
           </a:p>
@@ -1836,7 +1836,7 @@
           <a:p>
             <a:fld id="{A7DB5662-7327-465C-9A70-AD96B7A8D67A}" type="datetimeFigureOut">
               <a:rPr lang="en-US" smtClean="0"/>
-              <a:t>10/4/2022</a:t>
+              <a:t>10/18/2022</a:t>
             </a:fld>
             <a:endParaRPr lang="en-US"/>
           </a:p>
@@ -1977,7 +1977,7 @@
           <a:p>
             <a:fld id="{A7DB5662-7327-465C-9A70-AD96B7A8D67A}" type="datetimeFigureOut">
               <a:rPr lang="en-US" smtClean="0"/>
-              <a:t>10/4/2022</a:t>
+              <a:t>10/18/2022</a:t>
             </a:fld>
             <a:endParaRPr lang="en-US"/>
           </a:p>
@@ -2090,7 +2090,7 @@
           <a:p>
             <a:fld id="{A7DB5662-7327-465C-9A70-AD96B7A8D67A}" type="datetimeFigureOut">
               <a:rPr lang="en-US" smtClean="0"/>
-              <a:t>10/4/2022</a:t>
+              <a:t>10/18/2022</a:t>
             </a:fld>
             <a:endParaRPr lang="en-US"/>
           </a:p>
@@ -2401,7 +2401,7 @@
           <a:p>
             <a:fld id="{A7DB5662-7327-465C-9A70-AD96B7A8D67A}" type="datetimeFigureOut">
               <a:rPr lang="en-US" smtClean="0"/>
-              <a:t>10/4/2022</a:t>
+              <a:t>10/18/2022</a:t>
             </a:fld>
             <a:endParaRPr lang="en-US"/>
           </a:p>
@@ -2689,7 +2689,7 @@
           <a:p>
             <a:fld id="{A7DB5662-7327-465C-9A70-AD96B7A8D67A}" type="datetimeFigureOut">
               <a:rPr lang="en-US" smtClean="0"/>
-              <a:t>10/4/2022</a:t>
+              <a:t>10/18/2022</a:t>
             </a:fld>
             <a:endParaRPr lang="en-US"/>
           </a:p>
@@ -2930,7 +2930,7 @@
           <a:p>
             <a:fld id="{A7DB5662-7327-465C-9A70-AD96B7A8D67A}" type="datetimeFigureOut">
               <a:rPr lang="en-US" smtClean="0"/>
-              <a:t>10/4/2022</a:t>
+              <a:t>10/18/2022</a:t>
             </a:fld>
             <a:endParaRPr lang="en-US"/>
           </a:p>
@@ -21341,6 +21341,9 @@
           <a:lstStyle/>
           <a:p>
             <a:pPr>
+              <a:lnSpc>
+                <a:spcPct val="150000"/>
+              </a:lnSpc>
               <a:buFont typeface="Wingdings" panose="05000000000000000000" pitchFamily="2" charset="2"/>
               <a:buChar char="§"/>
             </a:pPr>
@@ -21348,7 +21351,7 @@
               <a:rPr lang="en-US" dirty="0">
                 <a:latin typeface="+mj-lt"/>
               </a:rPr>
-              <a:t>Assignments, groups of 1-2 students*: </a:t>
+              <a:t>Assignments, “groups” of 1-2 students: </a:t>
             </a:r>
             <a:r>
               <a:rPr lang="en-US" b="1" dirty="0">
@@ -21359,6 +21362,9 @@
           </a:p>
           <a:p>
             <a:pPr>
+              <a:lnSpc>
+                <a:spcPct val="150000"/>
+              </a:lnSpc>
               <a:buFont typeface="Wingdings" panose="05000000000000000000" pitchFamily="2" charset="2"/>
               <a:buChar char="§"/>
             </a:pPr>
@@ -21377,6 +21383,9 @@
           </a:p>
           <a:p>
             <a:pPr>
+              <a:lnSpc>
+                <a:spcPct val="150000"/>
+              </a:lnSpc>
               <a:buFont typeface="Wingdings" panose="05000000000000000000" pitchFamily="2" charset="2"/>
               <a:buChar char="§"/>
             </a:pPr>
@@ -21416,6 +21425,9 @@
           </a:p>
           <a:p>
             <a:pPr>
+              <a:lnSpc>
+                <a:spcPct val="150000"/>
+              </a:lnSpc>
               <a:buFont typeface="Wingdings" panose="05000000000000000000" pitchFamily="2" charset="2"/>
               <a:buChar char="§"/>
             </a:pPr>
@@ -21840,10 +21852,15 @@
         </p:nvSpPr>
         <p:spPr/>
         <p:txBody>
-          <a:bodyPr/>
+          <a:bodyPr>
+            <a:normAutofit fontScale="85000" lnSpcReduction="10000"/>
+          </a:bodyPr>
           <a:lstStyle/>
           <a:p>
             <a:pPr>
+              <a:lnSpc>
+                <a:spcPct val="150000"/>
+              </a:lnSpc>
               <a:buFont typeface="Wingdings" panose="05000000000000000000" pitchFamily="2" charset="2"/>
               <a:buChar char="§"/>
             </a:pPr>
@@ -21851,11 +21868,29 @@
               <a:rPr lang="en-US" dirty="0">
                 <a:latin typeface="+mj-lt"/>
               </a:rPr>
-              <a:t>I’m open to supervise master’s thesis (within my capabilities in terms of # of students) on ML topics.</a:t>
+              <a:t>I’m open to supervise master’s thesis (within my capabilities in terms of # of students) on ML topics. </a:t>
+            </a:r>
+          </a:p>
+          <a:p>
+            <a:pPr>
+              <a:lnSpc>
+                <a:spcPct val="150000"/>
+              </a:lnSpc>
+              <a:buFont typeface="Wingdings" panose="05000000000000000000" pitchFamily="2" charset="2"/>
+              <a:buChar char="§"/>
+            </a:pPr>
+            <a:r>
+              <a:rPr lang="en-US" dirty="0">
+                <a:latin typeface="+mj-lt"/>
+              </a:rPr>
+              <a:t>I’m interested I the following topics, but feel free to propose your own research ideas:</a:t>
             </a:r>
           </a:p>
           <a:p>
             <a:pPr lvl="1">
+              <a:lnSpc>
+                <a:spcPct val="150000"/>
+              </a:lnSpc>
               <a:buFont typeface="Wingdings" panose="05000000000000000000" pitchFamily="2" charset="2"/>
               <a:buChar char="§"/>
             </a:pPr>
@@ -21863,11 +21898,14 @@
               <a:rPr lang="en-US" dirty="0">
                 <a:latin typeface="+mj-lt"/>
               </a:rPr>
-              <a:t>Advanced applications of ML methods</a:t>
+              <a:t>Prediction of financial assets’ price</a:t>
             </a:r>
           </a:p>
           <a:p>
             <a:pPr lvl="1">
+              <a:lnSpc>
+                <a:spcPct val="150000"/>
+              </a:lnSpc>
               <a:buFont typeface="Wingdings" panose="05000000000000000000" pitchFamily="2" charset="2"/>
               <a:buChar char="§"/>
             </a:pPr>
@@ -21879,7 +21917,25 @@
             </a:r>
           </a:p>
           <a:p>
+            <a:pPr lvl="1">
+              <a:lnSpc>
+                <a:spcPct val="150000"/>
+              </a:lnSpc>
+              <a:buFont typeface="Wingdings" panose="05000000000000000000" pitchFamily="2" charset="2"/>
+              <a:buChar char="§"/>
+            </a:pPr>
+            <a:r>
+              <a:rPr lang="en-US" dirty="0">
+                <a:latin typeface="+mj-lt"/>
+              </a:rPr>
+              <a:t>Any advanced application of ML methods</a:t>
+            </a:r>
+          </a:p>
+          <a:p>
             <a:pPr>
+              <a:lnSpc>
+                <a:spcPct val="150000"/>
+              </a:lnSpc>
               <a:buFont typeface="Wingdings" panose="05000000000000000000" pitchFamily="2" charset="2"/>
               <a:buChar char="§"/>
             </a:pPr>
@@ -25982,7 +26038,7 @@
                 <a:ea typeface="Calibri" panose="020F0502020204030204" pitchFamily="34" charset="0"/>
                 <a:cs typeface="Times New Roman" panose="02020603050405020304" pitchFamily="18" charset="0"/>
               </a:rPr>
-              <a:t>(1-2 weeks)</a:t>
+              <a:t>(~1 week)</a:t>
             </a:r>
           </a:p>
           <a:p>
@@ -26094,7 +26150,7 @@
                 <a:ea typeface="Calibri" panose="020F0502020204030204" pitchFamily="34" charset="0"/>
                 <a:cs typeface="Times New Roman" panose="02020603050405020304" pitchFamily="18" charset="0"/>
               </a:rPr>
-              <a:t>Part II - Supervised Learning (4 weeks)</a:t>
+              <a:t>Part II - Supervised Learning (~4 weeks)</a:t>
             </a:r>
             <a:endParaRPr lang="en-US" sz="2000" dirty="0">
               <a:effectLst/>
@@ -26165,11 +26221,14 @@
             <a:r>
               <a:rPr lang="en-US" sz="2000" dirty="0">
                 <a:effectLst/>
+                <a:highlight>
+                  <a:srgbClr val="FFFF00"/>
+                </a:highlight>
                 <a:latin typeface="+mj-lt"/>
                 <a:ea typeface="Calibri" panose="020F0502020204030204" pitchFamily="34" charset="0"/>
                 <a:cs typeface="Times New Roman" panose="02020603050405020304" pitchFamily="18" charset="0"/>
               </a:rPr>
-              <a:t>Topic 6 – Neural Networks (HO Ch. 10)</a:t>
+              <a:t>Topic 6 – Neural Networks (HO Ch. 10) ??</a:t>
             </a:r>
           </a:p>
         </p:txBody>
@@ -26188,7 +26247,7 @@
         </p:nvSpPr>
         <p:spPr>
           <a:xfrm>
-            <a:off x="7175911" y="3104851"/>
+            <a:off x="7175911" y="3409646"/>
             <a:ext cx="1423939" cy="597146"/>
           </a:xfrm>
           <a:prstGeom prst="leftArrow">
@@ -26563,10 +26622,10 @@
       </p:sp>
       <p:sp>
         <p:nvSpPr>
-          <p:cNvPr id="8" name="TextBox 7">
+          <p:cNvPr id="9" name="TextBox 8">
             <a:extLst>
               <a:ext uri="{FF2B5EF4-FFF2-40B4-BE49-F238E27FC236}">
-                <a16:creationId xmlns:a16="http://schemas.microsoft.com/office/drawing/2014/main" id="{B74ED656-C251-EE9B-82EB-8CFE6759EAEE}"/>
+                <a16:creationId xmlns:a16="http://schemas.microsoft.com/office/drawing/2014/main" id="{97F27C87-1881-2242-DB08-E64B0E501A02}"/>
               </a:ext>
             </a:extLst>
           </p:cNvPr>
@@ -26575,29 +26634,41 @@
         </p:nvSpPr>
         <p:spPr>
           <a:xfrm>
-            <a:off x="8486383" y="4064635"/>
-            <a:ext cx="3144033" cy="923330"/>
+            <a:off x="6096000" y="5480989"/>
+            <a:ext cx="1423939" cy="794802"/>
           </a:xfrm>
-          <a:prstGeom prst="rect">
+          <a:prstGeom prst="leftArrow">
             <a:avLst/>
           </a:prstGeom>
-          <a:noFill/>
+          <a:solidFill>
+            <a:srgbClr val="FFFF00"/>
+          </a:solidFill>
+          <a:ln>
+            <a:solidFill>
+              <a:srgbClr val="FFFF00"/>
+            </a:solidFill>
+          </a:ln>
         </p:spPr>
         <p:txBody>
-          <a:bodyPr wrap="square" rtlCol="0">
+          <a:bodyPr wrap="square" rtlCol="0" anchor="ctr">
             <a:spAutoFit/>
           </a:bodyPr>
           <a:lstStyle/>
           <a:p>
             <a:pPr algn="ctr"/>
             <a:r>
-              <a:rPr lang="en-US" b="1" dirty="0">
+              <a:rPr lang="en-US" sz="2000" b="1" dirty="0">
                 <a:solidFill>
                   <a:srgbClr val="FF0000"/>
                 </a:solidFill>
               </a:rPr>
-              <a:t>*We can split this assignment if you think it will be very time consuming.</a:t>
-            </a:r>
+              <a:t>HW #2</a:t>
+            </a:r>
+            <a:endParaRPr lang="en-US" sz="1600" b="1" dirty="0">
+              <a:solidFill>
+                <a:srgbClr val="FF0000"/>
+              </a:solidFill>
+            </a:endParaRPr>
           </a:p>
         </p:txBody>
       </p:sp>
@@ -26702,7 +26773,7 @@
                 <a:ea typeface="Calibri" panose="020F0502020204030204" pitchFamily="34" charset="0"/>
                 <a:cs typeface="Times New Roman" panose="02020603050405020304" pitchFamily="18" charset="0"/>
               </a:rPr>
-              <a:t>Part III - Unsupervised Learning (3 weeks)</a:t>
+              <a:t>Part III - Unsupervised Learning (~3 weeks)</a:t>
             </a:r>
             <a:endParaRPr lang="en-US" sz="2000" dirty="0">
               <a:effectLst/>
@@ -26803,23 +26874,8 @@
                 <a:ea typeface="Calibri" panose="020F0502020204030204" pitchFamily="34" charset="0"/>
                 <a:cs typeface="Times New Roman" panose="02020603050405020304" pitchFamily="18" charset="0"/>
               </a:rPr>
-              <a:t>Advanced topics (</a:t>
-            </a:r>
-            <a:r>
-              <a:rPr lang="en-US" sz="2000" b="1">
-                <a:effectLst/>
-                <a:latin typeface="+mj-lt"/>
-                <a:ea typeface="Calibri" panose="020F0502020204030204" pitchFamily="34" charset="0"/>
-                <a:cs typeface="Times New Roman" panose="02020603050405020304" pitchFamily="18" charset="0"/>
-              </a:rPr>
-              <a:t>2 days)</a:t>
-            </a:r>
-            <a:endParaRPr lang="en-US" sz="2000" b="1" dirty="0">
-              <a:effectLst/>
-              <a:latin typeface="+mj-lt"/>
-              <a:ea typeface="Calibri" panose="020F0502020204030204" pitchFamily="34" charset="0"/>
-              <a:cs typeface="Times New Roman" panose="02020603050405020304" pitchFamily="18" charset="0"/>
-            </a:endParaRPr>
+              <a:t>Advanced topics (2 days)</a:t>
+            </a:r>
           </a:p>
           <a:p>
             <a:pPr marL="342900" marR="0" lvl="0" indent="-342900">
@@ -27292,7 +27348,7 @@
         </p:nvSpPr>
         <p:spPr>
           <a:xfrm>
-            <a:off x="7985268" y="3824285"/>
+            <a:off x="7912273" y="3703783"/>
             <a:ext cx="1423939" cy="1406188"/>
           </a:xfrm>
           <a:prstGeom prst="leftArrow">
@@ -27411,6 +27467,9 @@
           <a:lstStyle/>
           <a:p>
             <a:pPr>
+              <a:lnSpc>
+                <a:spcPct val="150000"/>
+              </a:lnSpc>
               <a:buFont typeface="Wingdings" panose="05000000000000000000" pitchFamily="2" charset="2"/>
               <a:buChar char="§"/>
             </a:pPr>
@@ -27448,6 +27507,9 @@
           </a:p>
           <a:p>
             <a:pPr>
+              <a:lnSpc>
+                <a:spcPct val="150000"/>
+              </a:lnSpc>
               <a:buFont typeface="Wingdings" panose="05000000000000000000" pitchFamily="2" charset="2"/>
               <a:buChar char="§"/>
             </a:pPr>
@@ -27460,32 +27522,32 @@
           </a:p>
           <a:p>
             <a:pPr>
+              <a:lnSpc>
+                <a:spcPct val="150000"/>
+              </a:lnSpc>
               <a:buFont typeface="Wingdings" panose="05000000000000000000" pitchFamily="2" charset="2"/>
               <a:buChar char="§"/>
             </a:pPr>
             <a:r>
-              <a:rPr lang="en-US" dirty="0" err="1">
+              <a:rPr lang="en-US" dirty="0">
                 <a:latin typeface="+mj-lt"/>
               </a:rPr>
-              <a:t>Github</a:t>
-            </a:r>
-            <a:endParaRPr lang="en-US" dirty="0">
-              <a:latin typeface="+mj-lt"/>
-            </a:endParaRPr>
+              <a:t>GitHub</a:t>
+            </a:r>
           </a:p>
           <a:p>
             <a:pPr>
+              <a:lnSpc>
+                <a:spcPct val="150000"/>
+              </a:lnSpc>
               <a:buFont typeface="Wingdings" panose="05000000000000000000" pitchFamily="2" charset="2"/>
               <a:buChar char="§"/>
             </a:pPr>
             <a:r>
               <a:rPr lang="en-US" dirty="0">
-                <a:highlight>
-                  <a:srgbClr val="FFFF00"/>
-                </a:highlight>
                 <a:latin typeface="+mj-lt"/>
               </a:rPr>
-              <a:t>Moodle?</a:t>
+              <a:t>Moodle</a:t>
             </a:r>
           </a:p>
         </p:txBody>

--- a/Course content/Slides/Topic 0 - Course presentation.pptx
+++ b/Course content/Slides/Topic 0 - Course presentation.pptx
@@ -9,13 +9,12 @@
     <p:sldId id="267" r:id="rId3"/>
     <p:sldId id="258" r:id="rId4"/>
     <p:sldId id="259" r:id="rId5"/>
-    <p:sldId id="268" r:id="rId6"/>
-    <p:sldId id="262" r:id="rId7"/>
-    <p:sldId id="260" r:id="rId8"/>
-    <p:sldId id="265" r:id="rId9"/>
-    <p:sldId id="261" r:id="rId10"/>
-    <p:sldId id="263" r:id="rId11"/>
-    <p:sldId id="264" r:id="rId12"/>
+    <p:sldId id="262" r:id="rId6"/>
+    <p:sldId id="260" r:id="rId7"/>
+    <p:sldId id="265" r:id="rId8"/>
+    <p:sldId id="261" r:id="rId9"/>
+    <p:sldId id="263" r:id="rId10"/>
+    <p:sldId id="264" r:id="rId11"/>
   </p:sldIdLst>
   <p:sldSz cx="12192000" cy="6858000"/>
   <p:notesSz cx="6858000" cy="9144000"/>
@@ -131,6 +130,135 @@
     </p:ext>
   </p:extLst>
 </p:presentation>
+</file>
+
+<file path=ppt/revisionInfo.xml><?xml version="1.0" encoding="utf-8"?>
+<p1510:revInfo xmlns:a="http://schemas.openxmlformats.org/drawingml/2006/main" xmlns:r="http://schemas.openxmlformats.org/officeDocument/2006/relationships" xmlns:p1510="http://schemas.microsoft.com/office/powerpoint/2015/10/main">
+  <p1510:revLst>
+    <p1510:client id="{57F76B3A-18DC-491F-9F9A-8895FF154D34}" v="2" dt="2023-10-19T12:38:02.595"/>
+  </p1510:revLst>
+</p1510:revInfo>
+</file>
+
+<file path=ppt/changesInfos/changesInfo1.xml><?xml version="1.0" encoding="utf-8"?>
+<pc:chgInfo xmlns:a="http://schemas.openxmlformats.org/drawingml/2006/main" xmlns:r="http://schemas.openxmlformats.org/officeDocument/2006/relationships" xmlns:ac="http://schemas.microsoft.com/office/drawing/2013/main/command" xmlns:pc="http://schemas.microsoft.com/office/powerpoint/2013/main/command">
+  <pc:docChgLst>
+    <pc:chgData name="Javier Bas Vicente" userId="96bf8a96-3310-496c-8c7e-8a087f977faa" providerId="ADAL" clId="{57F76B3A-18DC-491F-9F9A-8895FF154D34}"/>
+    <pc:docChg chg="custSel delSld modSld">
+      <pc:chgData name="Javier Bas Vicente" userId="96bf8a96-3310-496c-8c7e-8a087f977faa" providerId="ADAL" clId="{57F76B3A-18DC-491F-9F9A-8895FF154D34}" dt="2023-10-19T12:39:37.532" v="269" actId="6549"/>
+      <pc:docMkLst>
+        <pc:docMk/>
+      </pc:docMkLst>
+      <pc:sldChg chg="addSp delSp modSp mod">
+        <pc:chgData name="Javier Bas Vicente" userId="96bf8a96-3310-496c-8c7e-8a087f977faa" providerId="ADAL" clId="{57F76B3A-18DC-491F-9F9A-8895FF154D34}" dt="2023-10-19T12:37:46.920" v="190" actId="14100"/>
+        <pc:sldMkLst>
+          <pc:docMk/>
+          <pc:sldMk cId="1427119661" sldId="260"/>
+        </pc:sldMkLst>
+        <pc:spChg chg="mod">
+          <ac:chgData name="Javier Bas Vicente" userId="96bf8a96-3310-496c-8c7e-8a087f977faa" providerId="ADAL" clId="{57F76B3A-18DC-491F-9F9A-8895FF154D34}" dt="2023-10-19T12:36:25.429" v="79" actId="13926"/>
+          <ac:spMkLst>
+            <pc:docMk/>
+            <pc:sldMk cId="1427119661" sldId="260"/>
+            <ac:spMk id="3" creationId="{13C5A222-61CF-976C-B57F-058020CD77DA}"/>
+          </ac:spMkLst>
+        </pc:spChg>
+        <pc:spChg chg="del">
+          <ac:chgData name="Javier Bas Vicente" userId="96bf8a96-3310-496c-8c7e-8a087f977faa" providerId="ADAL" clId="{57F76B3A-18DC-491F-9F9A-8895FF154D34}" dt="2023-10-19T12:35:12.972" v="5" actId="478"/>
+          <ac:spMkLst>
+            <pc:docMk/>
+            <pc:sldMk cId="1427119661" sldId="260"/>
+            <ac:spMk id="6" creationId="{AE38798F-EA5D-55E4-4A3C-27D6D1FF5C17}"/>
+          </ac:spMkLst>
+        </pc:spChg>
+        <pc:spChg chg="add mod">
+          <ac:chgData name="Javier Bas Vicente" userId="96bf8a96-3310-496c-8c7e-8a087f977faa" providerId="ADAL" clId="{57F76B3A-18DC-491F-9F9A-8895FF154D34}" dt="2023-10-19T12:37:46.920" v="190" actId="14100"/>
+          <ac:spMkLst>
+            <pc:docMk/>
+            <pc:sldMk cId="1427119661" sldId="260"/>
+            <ac:spMk id="8" creationId="{AB5F3367-1990-E2F1-24CF-87290EA9D2DD}"/>
+          </ac:spMkLst>
+        </pc:spChg>
+        <pc:spChg chg="mod">
+          <ac:chgData name="Javier Bas Vicente" userId="96bf8a96-3310-496c-8c7e-8a087f977faa" providerId="ADAL" clId="{57F76B3A-18DC-491F-9F9A-8895FF154D34}" dt="2023-10-19T12:37:36.184" v="183" actId="1037"/>
+          <ac:spMkLst>
+            <pc:docMk/>
+            <pc:sldMk cId="1427119661" sldId="260"/>
+            <ac:spMk id="9" creationId="{97F27C87-1881-2242-DB08-E64B0E501A02}"/>
+          </ac:spMkLst>
+        </pc:spChg>
+      </pc:sldChg>
+      <pc:sldChg chg="modSp mod">
+        <pc:chgData name="Javier Bas Vicente" userId="96bf8a96-3310-496c-8c7e-8a087f977faa" providerId="ADAL" clId="{57F76B3A-18DC-491F-9F9A-8895FF154D34}" dt="2023-10-19T12:39:37.532" v="269" actId="6549"/>
+        <pc:sldMkLst>
+          <pc:docMk/>
+          <pc:sldMk cId="2655584788" sldId="264"/>
+        </pc:sldMkLst>
+        <pc:spChg chg="mod">
+          <ac:chgData name="Javier Bas Vicente" userId="96bf8a96-3310-496c-8c7e-8a087f977faa" providerId="ADAL" clId="{57F76B3A-18DC-491F-9F9A-8895FF154D34}" dt="2023-10-19T12:39:37.532" v="269" actId="6549"/>
+          <ac:spMkLst>
+            <pc:docMk/>
+            <pc:sldMk cId="2655584788" sldId="264"/>
+            <ac:spMk id="3" creationId="{DCEE1605-AC2E-35E2-F8D8-5948305297F5}"/>
+          </ac:spMkLst>
+        </pc:spChg>
+      </pc:sldChg>
+      <pc:sldChg chg="addSp delSp modSp mod">
+        <pc:chgData name="Javier Bas Vicente" userId="96bf8a96-3310-496c-8c7e-8a087f977faa" providerId="ADAL" clId="{57F76B3A-18DC-491F-9F9A-8895FF154D34}" dt="2023-10-19T12:38:20.400" v="198" actId="208"/>
+        <pc:sldMkLst>
+          <pc:docMk/>
+          <pc:sldMk cId="3889292457" sldId="265"/>
+        </pc:sldMkLst>
+        <pc:spChg chg="del">
+          <ac:chgData name="Javier Bas Vicente" userId="96bf8a96-3310-496c-8c7e-8a087f977faa" providerId="ADAL" clId="{57F76B3A-18DC-491F-9F9A-8895FF154D34}" dt="2023-10-19T12:37:57.233" v="191" actId="478"/>
+          <ac:spMkLst>
+            <pc:docMk/>
+            <pc:sldMk cId="3889292457" sldId="265"/>
+            <ac:spMk id="4" creationId="{A3CB61AE-D4C0-BAB2-BAD3-9CB8C6CED763}"/>
+          </ac:spMkLst>
+        </pc:spChg>
+        <pc:spChg chg="mod">
+          <ac:chgData name="Javier Bas Vicente" userId="96bf8a96-3310-496c-8c7e-8a087f977faa" providerId="ADAL" clId="{57F76B3A-18DC-491F-9F9A-8895FF154D34}" dt="2023-10-19T12:38:20.400" v="198" actId="208"/>
+          <ac:spMkLst>
+            <pc:docMk/>
+            <pc:sldMk cId="3889292457" sldId="265"/>
+            <ac:spMk id="8" creationId="{4B9D467B-EAAF-5EFB-E9D7-B976C5A570C7}"/>
+          </ac:spMkLst>
+        </pc:spChg>
+        <pc:spChg chg="add mod">
+          <ac:chgData name="Javier Bas Vicente" userId="96bf8a96-3310-496c-8c7e-8a087f977faa" providerId="ADAL" clId="{57F76B3A-18DC-491F-9F9A-8895FF154D34}" dt="2023-10-19T12:38:07.824" v="195" actId="20577"/>
+          <ac:spMkLst>
+            <pc:docMk/>
+            <pc:sldMk cId="3889292457" sldId="265"/>
+            <ac:spMk id="9" creationId="{AB2DC760-57B0-E7B1-A518-1E83243CC83A}"/>
+          </ac:spMkLst>
+        </pc:spChg>
+      </pc:sldChg>
+      <pc:sldChg chg="modSp mod">
+        <pc:chgData name="Javier Bas Vicente" userId="96bf8a96-3310-496c-8c7e-8a087f977faa" providerId="ADAL" clId="{57F76B3A-18DC-491F-9F9A-8895FF154D34}" dt="2023-10-19T12:33:59.168" v="3" actId="20577"/>
+        <pc:sldMkLst>
+          <pc:docMk/>
+          <pc:sldMk cId="2149080833" sldId="266"/>
+        </pc:sldMkLst>
+        <pc:spChg chg="mod">
+          <ac:chgData name="Javier Bas Vicente" userId="96bf8a96-3310-496c-8c7e-8a087f977faa" providerId="ADAL" clId="{57F76B3A-18DC-491F-9F9A-8895FF154D34}" dt="2023-10-19T12:33:59.168" v="3" actId="20577"/>
+          <ac:spMkLst>
+            <pc:docMk/>
+            <pc:sldMk cId="2149080833" sldId="266"/>
+            <ac:spMk id="3" creationId="{6866AA87-E000-52D2-F65D-4B414B00BBE5}"/>
+          </ac:spMkLst>
+        </pc:spChg>
+      </pc:sldChg>
+      <pc:sldChg chg="del">
+        <pc:chgData name="Javier Bas Vicente" userId="96bf8a96-3310-496c-8c7e-8a087f977faa" providerId="ADAL" clId="{57F76B3A-18DC-491F-9F9A-8895FF154D34}" dt="2023-10-19T12:34:42.887" v="4" actId="47"/>
+        <pc:sldMkLst>
+          <pc:docMk/>
+          <pc:sldMk cId="1134463671" sldId="268"/>
+        </pc:sldMkLst>
+      </pc:sldChg>
+    </pc:docChg>
+  </pc:docChgLst>
+</pc:chgInfo>
 </file>
 
 <file path=ppt/slideLayouts/slideLayout1.xml><?xml version="1.0" encoding="utf-8"?>
@@ -280,7 +408,7 @@
           <a:p>
             <a:fld id="{A7DB5662-7327-465C-9A70-AD96B7A8D67A}" type="datetimeFigureOut">
               <a:rPr lang="en-US" smtClean="0"/>
-              <a:t>10/18/2022</a:t>
+              <a:t>10/19/2023</a:t>
             </a:fld>
             <a:endParaRPr lang="en-US"/>
           </a:p>
@@ -478,7 +606,7 @@
           <a:p>
             <a:fld id="{A7DB5662-7327-465C-9A70-AD96B7A8D67A}" type="datetimeFigureOut">
               <a:rPr lang="en-US" smtClean="0"/>
-              <a:t>10/18/2022</a:t>
+              <a:t>10/19/2023</a:t>
             </a:fld>
             <a:endParaRPr lang="en-US"/>
           </a:p>
@@ -686,7 +814,7 @@
           <a:p>
             <a:fld id="{A7DB5662-7327-465C-9A70-AD96B7A8D67A}" type="datetimeFigureOut">
               <a:rPr lang="en-US" smtClean="0"/>
-              <a:t>10/18/2022</a:t>
+              <a:t>10/19/2023</a:t>
             </a:fld>
             <a:endParaRPr lang="en-US"/>
           </a:p>
@@ -884,7 +1012,7 @@
           <a:p>
             <a:fld id="{A7DB5662-7327-465C-9A70-AD96B7A8D67A}" type="datetimeFigureOut">
               <a:rPr lang="en-US" smtClean="0"/>
-              <a:t>10/18/2022</a:t>
+              <a:t>10/19/2023</a:t>
             </a:fld>
             <a:endParaRPr lang="en-US"/>
           </a:p>
@@ -1159,7 +1287,7 @@
           <a:p>
             <a:fld id="{A7DB5662-7327-465C-9A70-AD96B7A8D67A}" type="datetimeFigureOut">
               <a:rPr lang="en-US" smtClean="0"/>
-              <a:t>10/18/2022</a:t>
+              <a:t>10/19/2023</a:t>
             </a:fld>
             <a:endParaRPr lang="en-US"/>
           </a:p>
@@ -1424,7 +1552,7 @@
           <a:p>
             <a:fld id="{A7DB5662-7327-465C-9A70-AD96B7A8D67A}" type="datetimeFigureOut">
               <a:rPr lang="en-US" smtClean="0"/>
-              <a:t>10/18/2022</a:t>
+              <a:t>10/19/2023</a:t>
             </a:fld>
             <a:endParaRPr lang="en-US"/>
           </a:p>
@@ -1836,7 +1964,7 @@
           <a:p>
             <a:fld id="{A7DB5662-7327-465C-9A70-AD96B7A8D67A}" type="datetimeFigureOut">
               <a:rPr lang="en-US" smtClean="0"/>
-              <a:t>10/18/2022</a:t>
+              <a:t>10/19/2023</a:t>
             </a:fld>
             <a:endParaRPr lang="en-US"/>
           </a:p>
@@ -1977,7 +2105,7 @@
           <a:p>
             <a:fld id="{A7DB5662-7327-465C-9A70-AD96B7A8D67A}" type="datetimeFigureOut">
               <a:rPr lang="en-US" smtClean="0"/>
-              <a:t>10/18/2022</a:t>
+              <a:t>10/19/2023</a:t>
             </a:fld>
             <a:endParaRPr lang="en-US"/>
           </a:p>
@@ -2090,7 +2218,7 @@
           <a:p>
             <a:fld id="{A7DB5662-7327-465C-9A70-AD96B7A8D67A}" type="datetimeFigureOut">
               <a:rPr lang="en-US" smtClean="0"/>
-              <a:t>10/18/2022</a:t>
+              <a:t>10/19/2023</a:t>
             </a:fld>
             <a:endParaRPr lang="en-US"/>
           </a:p>
@@ -2401,7 +2529,7 @@
           <a:p>
             <a:fld id="{A7DB5662-7327-465C-9A70-AD96B7A8D67A}" type="datetimeFigureOut">
               <a:rPr lang="en-US" smtClean="0"/>
-              <a:t>10/18/2022</a:t>
+              <a:t>10/19/2023</a:t>
             </a:fld>
             <a:endParaRPr lang="en-US"/>
           </a:p>
@@ -2689,7 +2817,7 @@
           <a:p>
             <a:fld id="{A7DB5662-7327-465C-9A70-AD96B7A8D67A}" type="datetimeFigureOut">
               <a:rPr lang="en-US" smtClean="0"/>
-              <a:t>10/18/2022</a:t>
+              <a:t>10/19/2023</a:t>
             </a:fld>
             <a:endParaRPr lang="en-US"/>
           </a:p>
@@ -2930,7 +3058,7 @@
           <a:p>
             <a:fld id="{A7DB5662-7327-465C-9A70-AD96B7A8D67A}" type="datetimeFigureOut">
               <a:rPr lang="en-US" smtClean="0"/>
-              <a:t>10/18/2022</a:t>
+              <a:t>10/19/2023</a:t>
             </a:fld>
             <a:endParaRPr lang="en-US"/>
           </a:p>
@@ -3471,7 +3599,7 @@
                 <a:latin typeface="+mj-lt"/>
                 <a:cs typeface="Times New Roman" panose="02020603050405020304" pitchFamily="18" charset="0"/>
               </a:rPr>
-              <a:t>2022/2023</a:t>
+              <a:t>2023/2024</a:t>
             </a:r>
             <a:endParaRPr lang="en-US" sz="2000" dirty="0">
               <a:latin typeface="+mj-lt"/>
@@ -21295,518 +21423,6 @@
           <p:cNvPr id="2" name="Title 1">
             <a:extLst>
               <a:ext uri="{FF2B5EF4-FFF2-40B4-BE49-F238E27FC236}">
-                <a16:creationId xmlns:a16="http://schemas.microsoft.com/office/drawing/2014/main" id="{AB068364-15C5-3BF6-D48C-9F8A6AEE255B}"/>
-              </a:ext>
-            </a:extLst>
-          </p:cNvPr>
-          <p:cNvSpPr>
-            <a:spLocks noGrp="1"/>
-          </p:cNvSpPr>
-          <p:nvPr>
-            <p:ph type="title"/>
-          </p:nvPr>
-        </p:nvSpPr>
-        <p:spPr/>
-        <p:txBody>
-          <a:bodyPr/>
-          <a:lstStyle/>
-          <a:p>
-            <a:r>
-              <a:rPr lang="es-ES" dirty="0" err="1"/>
-              <a:t>Assessment</a:t>
-            </a:r>
-            <a:endParaRPr lang="en-US" dirty="0"/>
-          </a:p>
-        </p:txBody>
-      </p:sp>
-      <p:sp>
-        <p:nvSpPr>
-          <p:cNvPr id="3" name="Content Placeholder 2">
-            <a:extLst>
-              <a:ext uri="{FF2B5EF4-FFF2-40B4-BE49-F238E27FC236}">
-                <a16:creationId xmlns:a16="http://schemas.microsoft.com/office/drawing/2014/main" id="{74832070-BBD7-9FCA-BB9C-F3611835FF33}"/>
-              </a:ext>
-            </a:extLst>
-          </p:cNvPr>
-          <p:cNvSpPr>
-            <a:spLocks noGrp="1"/>
-          </p:cNvSpPr>
-          <p:nvPr>
-            <p:ph idx="1"/>
-          </p:nvPr>
-        </p:nvSpPr>
-        <p:spPr/>
-        <p:txBody>
-          <a:bodyPr/>
-          <a:lstStyle/>
-          <a:p>
-            <a:pPr>
-              <a:lnSpc>
-                <a:spcPct val="150000"/>
-              </a:lnSpc>
-              <a:buFont typeface="Wingdings" panose="05000000000000000000" pitchFamily="2" charset="2"/>
-              <a:buChar char="§"/>
-            </a:pPr>
-            <a:r>
-              <a:rPr lang="en-US" dirty="0">
-                <a:latin typeface="+mj-lt"/>
-              </a:rPr>
-              <a:t>Assignments, “groups” of 1-2 students: </a:t>
-            </a:r>
-            <a:r>
-              <a:rPr lang="en-US" b="1" dirty="0">
-                <a:latin typeface="+mj-lt"/>
-              </a:rPr>
-              <a:t>40%</a:t>
-            </a:r>
-          </a:p>
-          <a:p>
-            <a:pPr>
-              <a:lnSpc>
-                <a:spcPct val="150000"/>
-              </a:lnSpc>
-              <a:buFont typeface="Wingdings" panose="05000000000000000000" pitchFamily="2" charset="2"/>
-              <a:buChar char="§"/>
-            </a:pPr>
-            <a:r>
-              <a:rPr lang="en-US" dirty="0">
-                <a:latin typeface="+mj-lt"/>
-              </a:rPr>
-              <a:t>Final exam: </a:t>
-            </a:r>
-            <a:r>
-              <a:rPr lang="en-US" b="1" dirty="0">
-                <a:latin typeface="+mj-lt"/>
-              </a:rPr>
-              <a:t>60%</a:t>
-            </a:r>
-          </a:p>
-          <a:p>
-            <a:pPr>
-              <a:lnSpc>
-                <a:spcPct val="150000"/>
-              </a:lnSpc>
-              <a:buFont typeface="Wingdings" panose="05000000000000000000" pitchFamily="2" charset="2"/>
-              <a:buChar char="§"/>
-            </a:pPr>
-            <a:r>
-              <a:rPr lang="en-US" dirty="0">
-                <a:latin typeface="+mj-lt"/>
-              </a:rPr>
-              <a:t>Voluntary additional work: </a:t>
-            </a:r>
-            <a:r>
-              <a:rPr lang="en-US" b="1" dirty="0">
-                <a:latin typeface="+mj-lt"/>
-              </a:rPr>
-              <a:t>Bonus </a:t>
-            </a:r>
-            <a:r>
-              <a:rPr lang="en-US" dirty="0">
-                <a:latin typeface="+mj-lt"/>
-              </a:rPr>
-              <a:t>up to </a:t>
-            </a:r>
-            <a:r>
-              <a:rPr lang="en-US" b="1" dirty="0">
-                <a:latin typeface="+mj-lt"/>
-              </a:rPr>
-              <a:t>10%</a:t>
-            </a:r>
-            <a:r>
-              <a:rPr lang="en-US" dirty="0">
-                <a:latin typeface="+mj-lt"/>
-              </a:rPr>
-              <a:t>, additional to the final grade (if &gt; 5)</a:t>
-            </a:r>
-            <a:endParaRPr lang="en-US" b="1" dirty="0">
-              <a:latin typeface="+mj-lt"/>
-            </a:endParaRPr>
-          </a:p>
-          <a:p>
-            <a:pPr>
-              <a:lnSpc>
-                <a:spcPct val="150000"/>
-              </a:lnSpc>
-              <a:buFont typeface="Wingdings" panose="05000000000000000000" pitchFamily="2" charset="2"/>
-              <a:buChar char="§"/>
-            </a:pPr>
-            <a:endParaRPr lang="en-US" dirty="0">
-              <a:latin typeface="+mj-lt"/>
-            </a:endParaRPr>
-          </a:p>
-        </p:txBody>
-      </p:sp>
-      <p:sp>
-        <p:nvSpPr>
-          <p:cNvPr id="4" name="Rectángulo 3">
-            <a:extLst>
-              <a:ext uri="{FF2B5EF4-FFF2-40B4-BE49-F238E27FC236}">
-                <a16:creationId xmlns:a16="http://schemas.microsoft.com/office/drawing/2014/main" id="{DD58828A-4424-2064-0CAC-6F62F86F4321}"/>
-              </a:ext>
-            </a:extLst>
-          </p:cNvPr>
-          <p:cNvSpPr/>
-          <p:nvPr/>
-        </p:nvSpPr>
-        <p:spPr>
-          <a:xfrm>
-            <a:off x="0" y="0"/>
-            <a:ext cx="374469" cy="6858000"/>
-          </a:xfrm>
-          <a:prstGeom prst="rect">
-            <a:avLst/>
-          </a:prstGeom>
-        </p:spPr>
-        <p:style>
-          <a:lnRef idx="2">
-            <a:schemeClr val="accent2">
-              <a:shade val="50000"/>
-            </a:schemeClr>
-          </a:lnRef>
-          <a:fillRef idx="1">
-            <a:schemeClr val="accent2"/>
-          </a:fillRef>
-          <a:effectRef idx="0">
-            <a:schemeClr val="accent2"/>
-          </a:effectRef>
-          <a:fontRef idx="minor">
-            <a:schemeClr val="lt1"/>
-          </a:fontRef>
-        </p:style>
-        <p:txBody>
-          <a:bodyPr rtlCol="0" anchor="ctr"/>
-          <a:lstStyle/>
-          <a:p>
-            <a:pPr algn="ctr"/>
-            <a:endParaRPr lang="es-ES"/>
-          </a:p>
-        </p:txBody>
-      </p:sp>
-      <p:sp>
-        <p:nvSpPr>
-          <p:cNvPr id="5" name="Rectangle 143">
-            <a:extLst>
-              <a:ext uri="{FF2B5EF4-FFF2-40B4-BE49-F238E27FC236}">
-                <a16:creationId xmlns:a16="http://schemas.microsoft.com/office/drawing/2014/main" id="{B205DE6C-9F4E-6354-37BC-6FC313F527B6}"/>
-              </a:ext>
-            </a:extLst>
-          </p:cNvPr>
-          <p:cNvSpPr>
-            <a:spLocks noChangeArrowheads="1"/>
-          </p:cNvSpPr>
-          <p:nvPr/>
-        </p:nvSpPr>
-        <p:spPr bwMode="auto">
-          <a:xfrm>
-            <a:off x="448342" y="6401243"/>
-            <a:ext cx="5730175" cy="307777"/>
-          </a:xfrm>
-          <a:prstGeom prst="rect">
-            <a:avLst/>
-          </a:prstGeom>
-          <a:noFill/>
-          <a:ln>
-            <a:noFill/>
-          </a:ln>
-          <a:effectLst/>
-          <a:extLst>
-            <a:ext uri="{909E8E84-426E-40DD-AFC4-6F175D3DCCD1}">
-              <a14:hiddenFill xmlns:a14="http://schemas.microsoft.com/office/drawing/2010/main">
-                <a:solidFill>
-                  <a:schemeClr val="accent1"/>
-                </a:solidFill>
-              </a14:hiddenFill>
-            </a:ext>
-            <a:ext uri="{91240B29-F687-4F45-9708-019B960494DF}">
-              <a14:hiddenLine xmlns:a14="http://schemas.microsoft.com/office/drawing/2010/main" w="9525">
-                <a:solidFill>
-                  <a:schemeClr val="tx1"/>
-                </a:solidFill>
-                <a:miter lim="800000"/>
-                <a:headEnd/>
-                <a:tailEnd/>
-              </a14:hiddenLine>
-            </a:ext>
-            <a:ext uri="{AF507438-7753-43E0-B8FC-AC1667EBCBE1}">
-              <a14:hiddenEffects xmlns:a14="http://schemas.microsoft.com/office/drawing/2010/main">
-                <a:effectLst>
-                  <a:outerShdw dist="35921" dir="2700000" algn="ctr" rotWithShape="0">
-                    <a:schemeClr val="bg2"/>
-                  </a:outerShdw>
-                </a:effectLst>
-              </a14:hiddenEffects>
-            </a:ext>
-          </a:extLst>
-        </p:spPr>
-        <p:txBody>
-          <a:bodyPr vert="horz" wrap="square" lIns="91440" tIns="45720" rIns="91440" bIns="45720" numCol="1" anchor="ctr" anchorCtr="0" compatLnSpc="1">
-            <a:prstTxWarp prst="textNoShape">
-              <a:avLst/>
-            </a:prstTxWarp>
-            <a:spAutoFit/>
-          </a:bodyPr>
-          <a:lstStyle/>
-          <a:p>
-            <a:pPr marL="0" marR="0" lvl="0" indent="0" algn="l" defTabSz="914400" rtl="0" eaLnBrk="0" fontAlgn="base" latinLnBrk="0" hangingPunct="0">
-              <a:lnSpc>
-                <a:spcPct val="100000"/>
-              </a:lnSpc>
-              <a:spcBef>
-                <a:spcPct val="0"/>
-              </a:spcBef>
-              <a:spcAft>
-                <a:spcPct val="0"/>
-              </a:spcAft>
-              <a:buClrTx/>
-              <a:buSzTx/>
-              <a:buFontTx/>
-              <a:buNone/>
-              <a:tabLst/>
-            </a:pPr>
-            <a:r>
-              <a:rPr kumimoji="0" lang="en-US" altLang="es-ES" sz="1400" b="0" i="0" u="none" strike="noStrike" cap="none" normalizeH="0" baseline="0" dirty="0">
-                <a:ln>
-                  <a:noFill/>
-                </a:ln>
-                <a:solidFill>
-                  <a:srgbClr val="F4A200"/>
-                </a:solidFill>
-                <a:effectLst/>
-                <a:latin typeface="Arial" panose="020B0604020202020204" pitchFamily="34" charset="0"/>
-                <a:ea typeface="Myriad Pro Light"/>
-                <a:cs typeface="Times New Roman" panose="02020603050405020304" pitchFamily="18" charset="0"/>
-              </a:rPr>
-              <a:t>Master in Quantitative Economic Analysis </a:t>
-            </a:r>
-            <a:r>
-              <a:rPr kumimoji="0" lang="en-US" altLang="es-ES" sz="1400" b="0" i="0" u="none" strike="noStrike" cap="none" normalizeH="0" baseline="0" dirty="0" err="1">
-                <a:ln>
-                  <a:noFill/>
-                </a:ln>
-                <a:solidFill>
-                  <a:srgbClr val="F4A200"/>
-                </a:solidFill>
-                <a:effectLst/>
-                <a:latin typeface="Arial" panose="020B0604020202020204" pitchFamily="34" charset="0"/>
-                <a:ea typeface="Myriad Pro Light"/>
-                <a:cs typeface="Times New Roman" panose="02020603050405020304" pitchFamily="18" charset="0"/>
-              </a:rPr>
-              <a:t>MQuEA</a:t>
-            </a:r>
-            <a:endParaRPr kumimoji="0" lang="es-ES" altLang="es-ES" sz="500" b="0" i="0" u="none" strike="noStrike" cap="none" normalizeH="0" baseline="0" dirty="0">
-              <a:ln>
-                <a:noFill/>
-              </a:ln>
-              <a:solidFill>
-                <a:schemeClr val="tx1"/>
-              </a:solidFill>
-              <a:effectLst/>
-              <a:latin typeface="Arial" panose="020B0604020202020204" pitchFamily="34" charset="0"/>
-            </a:endParaRPr>
-          </a:p>
-        </p:txBody>
-      </p:sp>
-      <p:sp>
-        <p:nvSpPr>
-          <p:cNvPr id="6" name="Rectangle 143">
-            <a:extLst>
-              <a:ext uri="{FF2B5EF4-FFF2-40B4-BE49-F238E27FC236}">
-                <a16:creationId xmlns:a16="http://schemas.microsoft.com/office/drawing/2014/main" id="{F65B34BA-9730-D5C3-DE85-65860FBF231D}"/>
-              </a:ext>
-            </a:extLst>
-          </p:cNvPr>
-          <p:cNvSpPr>
-            <a:spLocks noChangeArrowheads="1"/>
-          </p:cNvSpPr>
-          <p:nvPr/>
-        </p:nvSpPr>
-        <p:spPr bwMode="auto">
-          <a:xfrm>
-            <a:off x="6186394" y="6411881"/>
-            <a:ext cx="5730175" cy="307777"/>
-          </a:xfrm>
-          <a:prstGeom prst="rect">
-            <a:avLst/>
-          </a:prstGeom>
-          <a:noFill/>
-          <a:ln>
-            <a:noFill/>
-          </a:ln>
-          <a:effectLst/>
-          <a:extLst>
-            <a:ext uri="{909E8E84-426E-40DD-AFC4-6F175D3DCCD1}">
-              <a14:hiddenFill xmlns:a14="http://schemas.microsoft.com/office/drawing/2010/main">
-                <a:solidFill>
-                  <a:schemeClr val="accent1"/>
-                </a:solidFill>
-              </a14:hiddenFill>
-            </a:ext>
-            <a:ext uri="{91240B29-F687-4F45-9708-019B960494DF}">
-              <a14:hiddenLine xmlns:a14="http://schemas.microsoft.com/office/drawing/2010/main" w="9525">
-                <a:solidFill>
-                  <a:schemeClr val="tx1"/>
-                </a:solidFill>
-                <a:miter lim="800000"/>
-                <a:headEnd/>
-                <a:tailEnd/>
-              </a14:hiddenLine>
-            </a:ext>
-            <a:ext uri="{AF507438-7753-43E0-B8FC-AC1667EBCBE1}">
-              <a14:hiddenEffects xmlns:a14="http://schemas.microsoft.com/office/drawing/2010/main">
-                <a:effectLst>
-                  <a:outerShdw dist="35921" dir="2700000" algn="ctr" rotWithShape="0">
-                    <a:schemeClr val="bg2"/>
-                  </a:outerShdw>
-                </a:effectLst>
-              </a14:hiddenEffects>
-            </a:ext>
-          </a:extLst>
-        </p:spPr>
-        <p:txBody>
-          <a:bodyPr vert="horz" wrap="square" lIns="91440" tIns="45720" rIns="91440" bIns="45720" numCol="1" anchor="ctr" anchorCtr="0" compatLnSpc="1">
-            <a:prstTxWarp prst="textNoShape">
-              <a:avLst/>
-            </a:prstTxWarp>
-            <a:spAutoFit/>
-          </a:bodyPr>
-          <a:lstStyle/>
-          <a:p>
-            <a:pPr marL="0" marR="0" lvl="0" indent="0" algn="r" defTabSz="914400" rtl="0" eaLnBrk="0" fontAlgn="base" latinLnBrk="0" hangingPunct="0">
-              <a:lnSpc>
-                <a:spcPct val="100000"/>
-              </a:lnSpc>
-              <a:spcBef>
-                <a:spcPct val="0"/>
-              </a:spcBef>
-              <a:spcAft>
-                <a:spcPct val="0"/>
-              </a:spcAft>
-              <a:buClrTx/>
-              <a:buSzTx/>
-              <a:buFontTx/>
-              <a:buNone/>
-              <a:tabLst/>
-            </a:pPr>
-            <a:r>
-              <a:rPr kumimoji="0" lang="en-US" altLang="es-ES" sz="1400" b="0" i="0" u="none" strike="noStrike" cap="none" normalizeH="0" baseline="0" dirty="0">
-                <a:ln>
-                  <a:noFill/>
-                </a:ln>
-                <a:solidFill>
-                  <a:srgbClr val="F4A200"/>
-                </a:solidFill>
-                <a:effectLst/>
-                <a:latin typeface="Arial" panose="020B0604020202020204" pitchFamily="34" charset="0"/>
-                <a:ea typeface="Myriad Pro Light"/>
-                <a:cs typeface="Times New Roman" panose="02020603050405020304" pitchFamily="18" charset="0"/>
-              </a:rPr>
-              <a:t>Universidad </a:t>
-            </a:r>
-            <a:r>
-              <a:rPr kumimoji="0" lang="en-US" altLang="es-ES" sz="1400" b="0" i="0" u="none" strike="noStrike" cap="none" normalizeH="0" baseline="0" dirty="0" err="1">
-                <a:ln>
-                  <a:noFill/>
-                </a:ln>
-                <a:solidFill>
-                  <a:srgbClr val="F4A200"/>
-                </a:solidFill>
-                <a:effectLst/>
-                <a:latin typeface="Arial" panose="020B0604020202020204" pitchFamily="34" charset="0"/>
-                <a:ea typeface="Myriad Pro Light"/>
-                <a:cs typeface="Times New Roman" panose="02020603050405020304" pitchFamily="18" charset="0"/>
-              </a:rPr>
-              <a:t>Aut</a:t>
-            </a:r>
-            <a:r>
-              <a:rPr lang="en-US" altLang="es-ES" sz="1400" dirty="0" err="1">
-                <a:solidFill>
-                  <a:srgbClr val="F4A200"/>
-                </a:solidFill>
-                <a:latin typeface="Arial" panose="020B0604020202020204" pitchFamily="34" charset="0"/>
-                <a:ea typeface="Myriad Pro Light"/>
-                <a:cs typeface="Times New Roman" panose="02020603050405020304" pitchFamily="18" charset="0"/>
-              </a:rPr>
-              <a:t>ó</a:t>
-            </a:r>
-            <a:r>
-              <a:rPr kumimoji="0" lang="en-US" altLang="es-ES" sz="1400" b="0" i="0" u="none" strike="noStrike" cap="none" normalizeH="0" baseline="0" dirty="0" err="1">
-                <a:ln>
-                  <a:noFill/>
-                </a:ln>
-                <a:solidFill>
-                  <a:srgbClr val="F4A200"/>
-                </a:solidFill>
-                <a:effectLst/>
-                <a:latin typeface="Arial" panose="020B0604020202020204" pitchFamily="34" charset="0"/>
-                <a:ea typeface="Myriad Pro Light"/>
-                <a:cs typeface="Times New Roman" panose="02020603050405020304" pitchFamily="18" charset="0"/>
-              </a:rPr>
-              <a:t>noma</a:t>
-            </a:r>
-            <a:r>
-              <a:rPr kumimoji="0" lang="en-US" altLang="es-ES" sz="1400" b="0" i="0" u="none" strike="noStrike" cap="none" normalizeH="0" baseline="0" dirty="0">
-                <a:ln>
-                  <a:noFill/>
-                </a:ln>
-                <a:solidFill>
-                  <a:srgbClr val="F4A200"/>
-                </a:solidFill>
-                <a:effectLst/>
-                <a:latin typeface="Arial" panose="020B0604020202020204" pitchFamily="34" charset="0"/>
-                <a:ea typeface="Myriad Pro Light"/>
-                <a:cs typeface="Times New Roman" panose="02020603050405020304" pitchFamily="18" charset="0"/>
-              </a:rPr>
-              <a:t> de Madrid</a:t>
-            </a:r>
-            <a:endParaRPr kumimoji="0" lang="es-ES" altLang="es-ES" sz="500" b="0" i="0" u="none" strike="noStrike" cap="none" normalizeH="0" baseline="0" dirty="0">
-              <a:ln>
-                <a:noFill/>
-              </a:ln>
-              <a:solidFill>
-                <a:schemeClr val="tx1"/>
-              </a:solidFill>
-              <a:effectLst/>
-              <a:latin typeface="Arial" panose="020B0604020202020204" pitchFamily="34" charset="0"/>
-            </a:endParaRPr>
-          </a:p>
-        </p:txBody>
-      </p:sp>
-    </p:spTree>
-    <p:extLst>
-      <p:ext uri="{BB962C8B-B14F-4D97-AF65-F5344CB8AC3E}">
-        <p14:creationId xmlns:p14="http://schemas.microsoft.com/office/powerpoint/2010/main" val="3307144704"/>
-      </p:ext>
-    </p:extLst>
-  </p:cSld>
-  <p:clrMapOvr>
-    <a:masterClrMapping/>
-  </p:clrMapOvr>
-</p:sld>
-</file>
-
-<file path=ppt/slides/slide11.xml><?xml version="1.0" encoding="utf-8"?>
-<p:sld xmlns:a="http://schemas.openxmlformats.org/drawingml/2006/main" xmlns:r="http://schemas.openxmlformats.org/officeDocument/2006/relationships" xmlns:p="http://schemas.openxmlformats.org/presentationml/2006/main">
-  <p:cSld>
-    <p:spTree>
-      <p:nvGrpSpPr>
-        <p:cNvPr id="1" name=""/>
-        <p:cNvGrpSpPr/>
-        <p:nvPr/>
-      </p:nvGrpSpPr>
-      <p:grpSpPr>
-        <a:xfrm>
-          <a:off x="0" y="0"/>
-          <a:ext cx="0" cy="0"/>
-          <a:chOff x="0" y="0"/>
-          <a:chExt cx="0" cy="0"/>
-        </a:xfrm>
-      </p:grpSpPr>
-      <p:sp>
-        <p:nvSpPr>
-          <p:cNvPr id="2" name="Title 1">
-            <a:extLst>
-              <a:ext uri="{FF2B5EF4-FFF2-40B4-BE49-F238E27FC236}">
                 <a16:creationId xmlns:a16="http://schemas.microsoft.com/office/drawing/2014/main" id="{A2A95A75-F5A5-0E39-0195-54EC4B34499E}"/>
               </a:ext>
             </a:extLst>
@@ -21853,7 +21469,7 @@
         <p:spPr/>
         <p:txBody>
           <a:bodyPr>
-            <a:normAutofit fontScale="85000" lnSpcReduction="10000"/>
+            <a:normAutofit fontScale="85000" lnSpcReduction="20000"/>
           </a:bodyPr>
           <a:lstStyle/>
           <a:p>
@@ -21898,7 +21514,7 @@
               <a:rPr lang="en-US" dirty="0">
                 <a:latin typeface="+mj-lt"/>
               </a:rPr>
-              <a:t>Prediction of financial assets’ price</a:t>
+              <a:t>ML in transportation </a:t>
             </a:r>
           </a:p>
           <a:p>
@@ -21917,7 +21533,7 @@
             </a:r>
           </a:p>
           <a:p>
-            <a:pPr lvl="1">
+            <a:pPr>
               <a:lnSpc>
                 <a:spcPct val="150000"/>
               </a:lnSpc>
@@ -21925,10 +21541,16 @@
               <a:buChar char="§"/>
             </a:pPr>
             <a:r>
-              <a:rPr lang="en-US" dirty="0">
+              <a:rPr lang="en-US" b="1">
                 <a:latin typeface="+mj-lt"/>
               </a:rPr>
-              <a:t>Any advanced application of ML methods</a:t>
+              <a:t>Works must </a:t>
+            </a:r>
+            <a:r>
+              <a:rPr lang="en-US" b="1" dirty="0">
+                <a:latin typeface="+mj-lt"/>
+              </a:rPr>
+              <a:t>be innovative.</a:t>
             </a:r>
           </a:p>
           <a:p>
@@ -24768,615 +24390,6 @@
           <p:cNvPr id="2" name="Title 1">
             <a:extLst>
               <a:ext uri="{FF2B5EF4-FFF2-40B4-BE49-F238E27FC236}">
-                <a16:creationId xmlns:a16="http://schemas.microsoft.com/office/drawing/2014/main" id="{8D86130A-7A1A-CC83-1537-FB7DF52A0AC8}"/>
-              </a:ext>
-            </a:extLst>
-          </p:cNvPr>
-          <p:cNvSpPr>
-            <a:spLocks noGrp="1"/>
-          </p:cNvSpPr>
-          <p:nvPr>
-            <p:ph type="title"/>
-          </p:nvPr>
-        </p:nvSpPr>
-        <p:spPr/>
-        <p:txBody>
-          <a:bodyPr/>
-          <a:lstStyle/>
-          <a:p>
-            <a:r>
-              <a:rPr lang="es-ES" dirty="0" err="1">
-                <a:cs typeface="Times New Roman" panose="02020603050405020304" pitchFamily="18" charset="0"/>
-              </a:rPr>
-              <a:t>What</a:t>
-            </a:r>
-            <a:r>
-              <a:rPr lang="es-ES" dirty="0">
-                <a:cs typeface="Times New Roman" panose="02020603050405020304" pitchFamily="18" charset="0"/>
-              </a:rPr>
-              <a:t> </a:t>
-            </a:r>
-            <a:r>
-              <a:rPr lang="es-ES" dirty="0" err="1">
-                <a:cs typeface="Times New Roman" panose="02020603050405020304" pitchFamily="18" charset="0"/>
-              </a:rPr>
-              <a:t>this</a:t>
-            </a:r>
-            <a:r>
-              <a:rPr lang="es-ES" dirty="0">
-                <a:cs typeface="Times New Roman" panose="02020603050405020304" pitchFamily="18" charset="0"/>
-              </a:rPr>
-              <a:t> </a:t>
-            </a:r>
-            <a:r>
-              <a:rPr lang="es-ES" dirty="0" err="1">
-                <a:cs typeface="Times New Roman" panose="02020603050405020304" pitchFamily="18" charset="0"/>
-              </a:rPr>
-              <a:t>course</a:t>
-            </a:r>
-            <a:r>
-              <a:rPr lang="es-ES" dirty="0">
-                <a:cs typeface="Times New Roman" panose="02020603050405020304" pitchFamily="18" charset="0"/>
-              </a:rPr>
-              <a:t> </a:t>
-            </a:r>
-            <a:r>
-              <a:rPr lang="es-ES" dirty="0" err="1">
-                <a:cs typeface="Times New Roman" panose="02020603050405020304" pitchFamily="18" charset="0"/>
-              </a:rPr>
-              <a:t>is</a:t>
-            </a:r>
-            <a:r>
-              <a:rPr lang="es-ES" dirty="0">
-                <a:cs typeface="Times New Roman" panose="02020603050405020304" pitchFamily="18" charset="0"/>
-              </a:rPr>
-              <a:t> and </a:t>
-            </a:r>
-            <a:r>
-              <a:rPr lang="es-ES" dirty="0" err="1">
-                <a:cs typeface="Times New Roman" panose="02020603050405020304" pitchFamily="18" charset="0"/>
-              </a:rPr>
-              <a:t>what</a:t>
-            </a:r>
-            <a:r>
-              <a:rPr lang="es-ES" dirty="0">
-                <a:cs typeface="Times New Roman" panose="02020603050405020304" pitchFamily="18" charset="0"/>
-              </a:rPr>
-              <a:t> </a:t>
-            </a:r>
-            <a:r>
-              <a:rPr lang="es-ES" dirty="0" err="1">
-                <a:cs typeface="Times New Roman" panose="02020603050405020304" pitchFamily="18" charset="0"/>
-              </a:rPr>
-              <a:t>it</a:t>
-            </a:r>
-            <a:r>
-              <a:rPr lang="es-ES" dirty="0">
-                <a:cs typeface="Times New Roman" panose="02020603050405020304" pitchFamily="18" charset="0"/>
-              </a:rPr>
-              <a:t> </a:t>
-            </a:r>
-            <a:r>
-              <a:rPr lang="es-ES" dirty="0" err="1">
-                <a:cs typeface="Times New Roman" panose="02020603050405020304" pitchFamily="18" charset="0"/>
-              </a:rPr>
-              <a:t>is</a:t>
-            </a:r>
-            <a:r>
-              <a:rPr lang="es-ES" dirty="0">
-                <a:cs typeface="Times New Roman" panose="02020603050405020304" pitchFamily="18" charset="0"/>
-              </a:rPr>
-              <a:t> </a:t>
-            </a:r>
-            <a:r>
-              <a:rPr lang="es-ES" dirty="0" err="1">
-                <a:cs typeface="Times New Roman" panose="02020603050405020304" pitchFamily="18" charset="0"/>
-              </a:rPr>
-              <a:t>not</a:t>
-            </a:r>
-            <a:endParaRPr lang="en-US" dirty="0">
-              <a:cs typeface="Times New Roman" panose="02020603050405020304" pitchFamily="18" charset="0"/>
-            </a:endParaRPr>
-          </a:p>
-        </p:txBody>
-      </p:sp>
-      <p:sp>
-        <p:nvSpPr>
-          <p:cNvPr id="3" name="Content Placeholder 2">
-            <a:extLst>
-              <a:ext uri="{FF2B5EF4-FFF2-40B4-BE49-F238E27FC236}">
-                <a16:creationId xmlns:a16="http://schemas.microsoft.com/office/drawing/2014/main" id="{8247397B-AC22-78CC-1A6D-53E25A92F4B9}"/>
-              </a:ext>
-            </a:extLst>
-          </p:cNvPr>
-          <p:cNvSpPr>
-            <a:spLocks noGrp="1"/>
-          </p:cNvSpPr>
-          <p:nvPr>
-            <p:ph idx="1"/>
-          </p:nvPr>
-        </p:nvSpPr>
-        <p:spPr/>
-        <p:txBody>
-          <a:bodyPr>
-            <a:normAutofit/>
-          </a:bodyPr>
-          <a:lstStyle/>
-          <a:p>
-            <a:r>
-              <a:rPr lang="en-US" sz="2200" dirty="0">
-                <a:latin typeface="+mj-lt"/>
-                <a:cs typeface="Times New Roman" panose="02020603050405020304" pitchFamily="18" charset="0"/>
-              </a:rPr>
-              <a:t>What it is…</a:t>
-            </a:r>
-          </a:p>
-          <a:p>
-            <a:pPr lvl="1"/>
-            <a:r>
-              <a:rPr lang="en-US" sz="2200" dirty="0">
-                <a:latin typeface="+mj-lt"/>
-                <a:cs typeface="Times New Roman" panose="02020603050405020304" pitchFamily="18" charset="0"/>
-              </a:rPr>
-              <a:t>A </a:t>
-            </a:r>
-            <a:r>
-              <a:rPr lang="en-US" sz="2200" b="1" dirty="0">
-                <a:latin typeface="+mj-lt"/>
-                <a:cs typeface="Times New Roman" panose="02020603050405020304" pitchFamily="18" charset="0"/>
-              </a:rPr>
-              <a:t>theoretical </a:t>
-            </a:r>
-            <a:r>
-              <a:rPr lang="en-US" sz="2200" dirty="0">
-                <a:latin typeface="+mj-lt"/>
-                <a:cs typeface="Times New Roman" panose="02020603050405020304" pitchFamily="18" charset="0"/>
-              </a:rPr>
-              <a:t>and </a:t>
-            </a:r>
-            <a:r>
-              <a:rPr lang="en-US" sz="2200" b="1" dirty="0">
-                <a:latin typeface="+mj-lt"/>
-                <a:cs typeface="Times New Roman" panose="02020603050405020304" pitchFamily="18" charset="0"/>
-              </a:rPr>
-              <a:t>practical</a:t>
-            </a:r>
-            <a:r>
-              <a:rPr lang="en-US" sz="2200" dirty="0">
-                <a:latin typeface="+mj-lt"/>
-                <a:cs typeface="Times New Roman" panose="02020603050405020304" pitchFamily="18" charset="0"/>
-              </a:rPr>
-              <a:t> introduction to Machine Learning methods</a:t>
-            </a:r>
-          </a:p>
-          <a:p>
-            <a:pPr lvl="1"/>
-            <a:r>
-              <a:rPr lang="en-US" sz="2200" dirty="0">
-                <a:latin typeface="+mj-lt"/>
-                <a:cs typeface="Times New Roman" panose="02020603050405020304" pitchFamily="18" charset="0"/>
-              </a:rPr>
-              <a:t>A lab</a:t>
-            </a:r>
-          </a:p>
-          <a:p>
-            <a:pPr lvl="1"/>
-            <a:r>
-              <a:rPr lang="en-US" sz="2200" dirty="0">
-                <a:latin typeface="+mj-lt"/>
-                <a:cs typeface="Times New Roman" panose="02020603050405020304" pitchFamily="18" charset="0"/>
-              </a:rPr>
-              <a:t>A safe environment to make mistakes</a:t>
-            </a:r>
-          </a:p>
-          <a:p>
-            <a:pPr lvl="1"/>
-            <a:r>
-              <a:rPr lang="en-US" sz="2200" dirty="0">
-                <a:latin typeface="+mj-lt"/>
-                <a:cs typeface="Times New Roman" panose="02020603050405020304" pitchFamily="18" charset="0"/>
-              </a:rPr>
-              <a:t>A place to discuss, share and have fun while learning</a:t>
-            </a:r>
-          </a:p>
-          <a:p>
-            <a:pPr lvl="1"/>
-            <a:endParaRPr lang="en-US" sz="2200" dirty="0">
-              <a:latin typeface="+mj-lt"/>
-              <a:cs typeface="Times New Roman" panose="02020603050405020304" pitchFamily="18" charset="0"/>
-            </a:endParaRPr>
-          </a:p>
-          <a:p>
-            <a:r>
-              <a:rPr lang="en-US" sz="2200" dirty="0">
-                <a:latin typeface="+mj-lt"/>
-                <a:cs typeface="Times New Roman" panose="02020603050405020304" pitchFamily="18" charset="0"/>
-              </a:rPr>
-              <a:t>What it is not…</a:t>
-            </a:r>
-          </a:p>
-          <a:p>
-            <a:pPr lvl="1"/>
-            <a:r>
-              <a:rPr lang="en-US" sz="2200" dirty="0">
-                <a:latin typeface="+mj-lt"/>
-                <a:cs typeface="Times New Roman" panose="02020603050405020304" pitchFamily="18" charset="0"/>
-              </a:rPr>
-              <a:t>A coding course</a:t>
-            </a:r>
-          </a:p>
-        </p:txBody>
-      </p:sp>
-      <p:sp>
-        <p:nvSpPr>
-          <p:cNvPr id="4" name="Rectángulo 3">
-            <a:extLst>
-              <a:ext uri="{FF2B5EF4-FFF2-40B4-BE49-F238E27FC236}">
-                <a16:creationId xmlns:a16="http://schemas.microsoft.com/office/drawing/2014/main" id="{0969C331-A446-B8BC-377D-418B4095667E}"/>
-              </a:ext>
-            </a:extLst>
-          </p:cNvPr>
-          <p:cNvSpPr/>
-          <p:nvPr/>
-        </p:nvSpPr>
-        <p:spPr>
-          <a:xfrm>
-            <a:off x="0" y="0"/>
-            <a:ext cx="374469" cy="6858000"/>
-          </a:xfrm>
-          <a:prstGeom prst="rect">
-            <a:avLst/>
-          </a:prstGeom>
-        </p:spPr>
-        <p:style>
-          <a:lnRef idx="2">
-            <a:schemeClr val="accent2">
-              <a:shade val="50000"/>
-            </a:schemeClr>
-          </a:lnRef>
-          <a:fillRef idx="1">
-            <a:schemeClr val="accent2"/>
-          </a:fillRef>
-          <a:effectRef idx="0">
-            <a:schemeClr val="accent2"/>
-          </a:effectRef>
-          <a:fontRef idx="minor">
-            <a:schemeClr val="lt1"/>
-          </a:fontRef>
-        </p:style>
-        <p:txBody>
-          <a:bodyPr rtlCol="0" anchor="ctr"/>
-          <a:lstStyle/>
-          <a:p>
-            <a:pPr algn="ctr"/>
-            <a:endParaRPr lang="es-ES"/>
-          </a:p>
-        </p:txBody>
-      </p:sp>
-      <p:sp>
-        <p:nvSpPr>
-          <p:cNvPr id="5" name="Rectangle 143">
-            <a:extLst>
-              <a:ext uri="{FF2B5EF4-FFF2-40B4-BE49-F238E27FC236}">
-                <a16:creationId xmlns:a16="http://schemas.microsoft.com/office/drawing/2014/main" id="{87391FD0-E07D-78C8-7432-D94AF069D233}"/>
-              </a:ext>
-            </a:extLst>
-          </p:cNvPr>
-          <p:cNvSpPr>
-            <a:spLocks noChangeArrowheads="1"/>
-          </p:cNvSpPr>
-          <p:nvPr/>
-        </p:nvSpPr>
-        <p:spPr bwMode="auto">
-          <a:xfrm>
-            <a:off x="448342" y="6401243"/>
-            <a:ext cx="5730175" cy="307777"/>
-          </a:xfrm>
-          <a:prstGeom prst="rect">
-            <a:avLst/>
-          </a:prstGeom>
-          <a:noFill/>
-          <a:ln>
-            <a:noFill/>
-          </a:ln>
-          <a:effectLst/>
-          <a:extLst>
-            <a:ext uri="{909E8E84-426E-40DD-AFC4-6F175D3DCCD1}">
-              <a14:hiddenFill xmlns:a14="http://schemas.microsoft.com/office/drawing/2010/main">
-                <a:solidFill>
-                  <a:schemeClr val="accent1"/>
-                </a:solidFill>
-              </a14:hiddenFill>
-            </a:ext>
-            <a:ext uri="{91240B29-F687-4F45-9708-019B960494DF}">
-              <a14:hiddenLine xmlns:a14="http://schemas.microsoft.com/office/drawing/2010/main" w="9525">
-                <a:solidFill>
-                  <a:schemeClr val="tx1"/>
-                </a:solidFill>
-                <a:miter lim="800000"/>
-                <a:headEnd/>
-                <a:tailEnd/>
-              </a14:hiddenLine>
-            </a:ext>
-            <a:ext uri="{AF507438-7753-43E0-B8FC-AC1667EBCBE1}">
-              <a14:hiddenEffects xmlns:a14="http://schemas.microsoft.com/office/drawing/2010/main">
-                <a:effectLst>
-                  <a:outerShdw dist="35921" dir="2700000" algn="ctr" rotWithShape="0">
-                    <a:schemeClr val="bg2"/>
-                  </a:outerShdw>
-                </a:effectLst>
-              </a14:hiddenEffects>
-            </a:ext>
-          </a:extLst>
-        </p:spPr>
-        <p:txBody>
-          <a:bodyPr vert="horz" wrap="square" lIns="91440" tIns="45720" rIns="91440" bIns="45720" numCol="1" anchor="ctr" anchorCtr="0" compatLnSpc="1">
-            <a:prstTxWarp prst="textNoShape">
-              <a:avLst/>
-            </a:prstTxWarp>
-            <a:spAutoFit/>
-          </a:bodyPr>
-          <a:lstStyle/>
-          <a:p>
-            <a:pPr marL="0" marR="0" lvl="0" indent="0" algn="l" defTabSz="914400" rtl="0" eaLnBrk="0" fontAlgn="base" latinLnBrk="0" hangingPunct="0">
-              <a:lnSpc>
-                <a:spcPct val="100000"/>
-              </a:lnSpc>
-              <a:spcBef>
-                <a:spcPct val="0"/>
-              </a:spcBef>
-              <a:spcAft>
-                <a:spcPct val="0"/>
-              </a:spcAft>
-              <a:buClrTx/>
-              <a:buSzTx/>
-              <a:buFontTx/>
-              <a:buNone/>
-              <a:tabLst/>
-            </a:pPr>
-            <a:r>
-              <a:rPr kumimoji="0" lang="en-US" altLang="es-ES" sz="1400" b="0" i="0" u="none" strike="noStrike" cap="none" normalizeH="0" baseline="0" dirty="0">
-                <a:ln>
-                  <a:noFill/>
-                </a:ln>
-                <a:solidFill>
-                  <a:srgbClr val="F4A200"/>
-                </a:solidFill>
-                <a:effectLst/>
-                <a:latin typeface="Arial" panose="020B0604020202020204" pitchFamily="34" charset="0"/>
-                <a:ea typeface="Myriad Pro Light"/>
-                <a:cs typeface="Times New Roman" panose="02020603050405020304" pitchFamily="18" charset="0"/>
-              </a:rPr>
-              <a:t>Master in Quantitative Economic Analysis </a:t>
-            </a:r>
-            <a:r>
-              <a:rPr kumimoji="0" lang="en-US" altLang="es-ES" sz="1400" b="0" i="0" u="none" strike="noStrike" cap="none" normalizeH="0" baseline="0" dirty="0" err="1">
-                <a:ln>
-                  <a:noFill/>
-                </a:ln>
-                <a:solidFill>
-                  <a:srgbClr val="F4A200"/>
-                </a:solidFill>
-                <a:effectLst/>
-                <a:latin typeface="Arial" panose="020B0604020202020204" pitchFamily="34" charset="0"/>
-                <a:ea typeface="Myriad Pro Light"/>
-                <a:cs typeface="Times New Roman" panose="02020603050405020304" pitchFamily="18" charset="0"/>
-              </a:rPr>
-              <a:t>MQuEA</a:t>
-            </a:r>
-            <a:endParaRPr kumimoji="0" lang="es-ES" altLang="es-ES" sz="500" b="0" i="0" u="none" strike="noStrike" cap="none" normalizeH="0" baseline="0" dirty="0">
-              <a:ln>
-                <a:noFill/>
-              </a:ln>
-              <a:solidFill>
-                <a:schemeClr val="tx1"/>
-              </a:solidFill>
-              <a:effectLst/>
-              <a:latin typeface="Arial" panose="020B0604020202020204" pitchFamily="34" charset="0"/>
-            </a:endParaRPr>
-          </a:p>
-        </p:txBody>
-      </p:sp>
-      <p:sp>
-        <p:nvSpPr>
-          <p:cNvPr id="6" name="Rectangle 143">
-            <a:extLst>
-              <a:ext uri="{FF2B5EF4-FFF2-40B4-BE49-F238E27FC236}">
-                <a16:creationId xmlns:a16="http://schemas.microsoft.com/office/drawing/2014/main" id="{AE429953-5458-8ABF-6D02-FEAB199CB4F0}"/>
-              </a:ext>
-            </a:extLst>
-          </p:cNvPr>
-          <p:cNvSpPr>
-            <a:spLocks noChangeArrowheads="1"/>
-          </p:cNvSpPr>
-          <p:nvPr/>
-        </p:nvSpPr>
-        <p:spPr bwMode="auto">
-          <a:xfrm>
-            <a:off x="6186394" y="6411881"/>
-            <a:ext cx="5730175" cy="307777"/>
-          </a:xfrm>
-          <a:prstGeom prst="rect">
-            <a:avLst/>
-          </a:prstGeom>
-          <a:noFill/>
-          <a:ln>
-            <a:noFill/>
-          </a:ln>
-          <a:effectLst/>
-          <a:extLst>
-            <a:ext uri="{909E8E84-426E-40DD-AFC4-6F175D3DCCD1}">
-              <a14:hiddenFill xmlns:a14="http://schemas.microsoft.com/office/drawing/2010/main">
-                <a:solidFill>
-                  <a:schemeClr val="accent1"/>
-                </a:solidFill>
-              </a14:hiddenFill>
-            </a:ext>
-            <a:ext uri="{91240B29-F687-4F45-9708-019B960494DF}">
-              <a14:hiddenLine xmlns:a14="http://schemas.microsoft.com/office/drawing/2010/main" w="9525">
-                <a:solidFill>
-                  <a:schemeClr val="tx1"/>
-                </a:solidFill>
-                <a:miter lim="800000"/>
-                <a:headEnd/>
-                <a:tailEnd/>
-              </a14:hiddenLine>
-            </a:ext>
-            <a:ext uri="{AF507438-7753-43E0-B8FC-AC1667EBCBE1}">
-              <a14:hiddenEffects xmlns:a14="http://schemas.microsoft.com/office/drawing/2010/main">
-                <a:effectLst>
-                  <a:outerShdw dist="35921" dir="2700000" algn="ctr" rotWithShape="0">
-                    <a:schemeClr val="bg2"/>
-                  </a:outerShdw>
-                </a:effectLst>
-              </a14:hiddenEffects>
-            </a:ext>
-          </a:extLst>
-        </p:spPr>
-        <p:txBody>
-          <a:bodyPr vert="horz" wrap="square" lIns="91440" tIns="45720" rIns="91440" bIns="45720" numCol="1" anchor="ctr" anchorCtr="0" compatLnSpc="1">
-            <a:prstTxWarp prst="textNoShape">
-              <a:avLst/>
-            </a:prstTxWarp>
-            <a:spAutoFit/>
-          </a:bodyPr>
-          <a:lstStyle/>
-          <a:p>
-            <a:pPr marL="0" marR="0" lvl="0" indent="0" algn="r" defTabSz="914400" rtl="0" eaLnBrk="0" fontAlgn="base" latinLnBrk="0" hangingPunct="0">
-              <a:lnSpc>
-                <a:spcPct val="100000"/>
-              </a:lnSpc>
-              <a:spcBef>
-                <a:spcPct val="0"/>
-              </a:spcBef>
-              <a:spcAft>
-                <a:spcPct val="0"/>
-              </a:spcAft>
-              <a:buClrTx/>
-              <a:buSzTx/>
-              <a:buFontTx/>
-              <a:buNone/>
-              <a:tabLst/>
-            </a:pPr>
-            <a:r>
-              <a:rPr kumimoji="0" lang="en-US" altLang="es-ES" sz="1400" b="0" i="0" u="none" strike="noStrike" cap="none" normalizeH="0" baseline="0" dirty="0">
-                <a:ln>
-                  <a:noFill/>
-                </a:ln>
-                <a:solidFill>
-                  <a:srgbClr val="F4A200"/>
-                </a:solidFill>
-                <a:effectLst/>
-                <a:latin typeface="Arial" panose="020B0604020202020204" pitchFamily="34" charset="0"/>
-                <a:ea typeface="Myriad Pro Light"/>
-                <a:cs typeface="Times New Roman" panose="02020603050405020304" pitchFamily="18" charset="0"/>
-              </a:rPr>
-              <a:t>Universidad </a:t>
-            </a:r>
-            <a:r>
-              <a:rPr kumimoji="0" lang="en-US" altLang="es-ES" sz="1400" b="0" i="0" u="none" strike="noStrike" cap="none" normalizeH="0" baseline="0" dirty="0" err="1">
-                <a:ln>
-                  <a:noFill/>
-                </a:ln>
-                <a:solidFill>
-                  <a:srgbClr val="F4A200"/>
-                </a:solidFill>
-                <a:effectLst/>
-                <a:latin typeface="Arial" panose="020B0604020202020204" pitchFamily="34" charset="0"/>
-                <a:ea typeface="Myriad Pro Light"/>
-                <a:cs typeface="Times New Roman" panose="02020603050405020304" pitchFamily="18" charset="0"/>
-              </a:rPr>
-              <a:t>Aut</a:t>
-            </a:r>
-            <a:r>
-              <a:rPr lang="en-US" altLang="es-ES" sz="1400" dirty="0" err="1">
-                <a:solidFill>
-                  <a:srgbClr val="F4A200"/>
-                </a:solidFill>
-                <a:latin typeface="Arial" panose="020B0604020202020204" pitchFamily="34" charset="0"/>
-                <a:ea typeface="Myriad Pro Light"/>
-                <a:cs typeface="Times New Roman" panose="02020603050405020304" pitchFamily="18" charset="0"/>
-              </a:rPr>
-              <a:t>ó</a:t>
-            </a:r>
-            <a:r>
-              <a:rPr kumimoji="0" lang="en-US" altLang="es-ES" sz="1400" b="0" i="0" u="none" strike="noStrike" cap="none" normalizeH="0" baseline="0" dirty="0" err="1">
-                <a:ln>
-                  <a:noFill/>
-                </a:ln>
-                <a:solidFill>
-                  <a:srgbClr val="F4A200"/>
-                </a:solidFill>
-                <a:effectLst/>
-                <a:latin typeface="Arial" panose="020B0604020202020204" pitchFamily="34" charset="0"/>
-                <a:ea typeface="Myriad Pro Light"/>
-                <a:cs typeface="Times New Roman" panose="02020603050405020304" pitchFamily="18" charset="0"/>
-              </a:rPr>
-              <a:t>noma</a:t>
-            </a:r>
-            <a:r>
-              <a:rPr kumimoji="0" lang="en-US" altLang="es-ES" sz="1400" b="0" i="0" u="none" strike="noStrike" cap="none" normalizeH="0" baseline="0" dirty="0">
-                <a:ln>
-                  <a:noFill/>
-                </a:ln>
-                <a:solidFill>
-                  <a:srgbClr val="F4A200"/>
-                </a:solidFill>
-                <a:effectLst/>
-                <a:latin typeface="Arial" panose="020B0604020202020204" pitchFamily="34" charset="0"/>
-                <a:ea typeface="Myriad Pro Light"/>
-                <a:cs typeface="Times New Roman" panose="02020603050405020304" pitchFamily="18" charset="0"/>
-              </a:rPr>
-              <a:t> de Madrid</a:t>
-            </a:r>
-            <a:endParaRPr kumimoji="0" lang="es-ES" altLang="es-ES" sz="500" b="0" i="0" u="none" strike="noStrike" cap="none" normalizeH="0" baseline="0" dirty="0">
-              <a:ln>
-                <a:noFill/>
-              </a:ln>
-              <a:solidFill>
-                <a:schemeClr val="tx1"/>
-              </a:solidFill>
-              <a:effectLst/>
-              <a:latin typeface="Arial" panose="020B0604020202020204" pitchFamily="34" charset="0"/>
-            </a:endParaRPr>
-          </a:p>
-        </p:txBody>
-      </p:sp>
-    </p:spTree>
-    <p:extLst>
-      <p:ext uri="{BB962C8B-B14F-4D97-AF65-F5344CB8AC3E}">
-        <p14:creationId xmlns:p14="http://schemas.microsoft.com/office/powerpoint/2010/main" val="1134463671"/>
-      </p:ext>
-    </p:extLst>
-  </p:cSld>
-  <p:clrMapOvr>
-    <a:masterClrMapping/>
-  </p:clrMapOvr>
-</p:sld>
-</file>
-
-<file path=ppt/slides/slide6.xml><?xml version="1.0" encoding="utf-8"?>
-<p:sld xmlns:a="http://schemas.openxmlformats.org/drawingml/2006/main" xmlns:r="http://schemas.openxmlformats.org/officeDocument/2006/relationships" xmlns:p="http://schemas.openxmlformats.org/presentationml/2006/main">
-  <p:cSld>
-    <p:spTree>
-      <p:nvGrpSpPr>
-        <p:cNvPr id="1" name=""/>
-        <p:cNvGrpSpPr/>
-        <p:nvPr/>
-      </p:nvGrpSpPr>
-      <p:grpSpPr>
-        <a:xfrm>
-          <a:off x="0" y="0"/>
-          <a:ext cx="0" cy="0"/>
-          <a:chOff x="0" y="0"/>
-          <a:chExt cx="0" cy="0"/>
-        </a:xfrm>
-      </p:grpSpPr>
-      <p:sp>
-        <p:nvSpPr>
-          <p:cNvPr id="2" name="Title 1">
-            <a:extLst>
-              <a:ext uri="{FF2B5EF4-FFF2-40B4-BE49-F238E27FC236}">
                 <a16:creationId xmlns:a16="http://schemas.microsoft.com/office/drawing/2014/main" id="{92D6FD99-17F3-D825-5093-11CC0D09FBAD}"/>
               </a:ext>
             </a:extLst>
@@ -25909,7 +24922,7 @@
 </p:sld>
 </file>
 
-<file path=ppt/slides/slide7.xml><?xml version="1.0" encoding="utf-8"?>
+<file path=ppt/slides/slide6.xml><?xml version="1.0" encoding="utf-8"?>
 <p:sld xmlns:a="http://schemas.openxmlformats.org/drawingml/2006/main" xmlns:r="http://schemas.openxmlformats.org/officeDocument/2006/relationships" xmlns:p="http://schemas.openxmlformats.org/presentationml/2006/main">
   <p:cSld>
     <p:spTree>
@@ -26221,67 +25234,12 @@
             <a:r>
               <a:rPr lang="en-US" sz="2000" dirty="0">
                 <a:effectLst/>
-                <a:highlight>
-                  <a:srgbClr val="FFFF00"/>
-                </a:highlight>
                 <a:latin typeface="+mj-lt"/>
                 <a:ea typeface="Calibri" panose="020F0502020204030204" pitchFamily="34" charset="0"/>
                 <a:cs typeface="Times New Roman" panose="02020603050405020304" pitchFamily="18" charset="0"/>
               </a:rPr>
-              <a:t>Topic 6 – Neural Networks (HO Ch. 10) ??</a:t>
+              <a:t>Topic 6 – Neural Networks (HO Ch. 10) </a:t>
             </a:r>
-          </a:p>
-        </p:txBody>
-      </p:sp>
-      <p:sp>
-        <p:nvSpPr>
-          <p:cNvPr id="6" name="TextBox 5">
-            <a:extLst>
-              <a:ext uri="{FF2B5EF4-FFF2-40B4-BE49-F238E27FC236}">
-                <a16:creationId xmlns:a16="http://schemas.microsoft.com/office/drawing/2014/main" id="{AE38798F-EA5D-55E4-4A3C-27D6D1FF5C17}"/>
-              </a:ext>
-            </a:extLst>
-          </p:cNvPr>
-          <p:cNvSpPr txBox="1"/>
-          <p:nvPr/>
-        </p:nvSpPr>
-        <p:spPr>
-          <a:xfrm>
-            <a:off x="7175911" y="3409646"/>
-            <a:ext cx="1423939" cy="597146"/>
-          </a:xfrm>
-          <a:prstGeom prst="leftArrow">
-            <a:avLst/>
-          </a:prstGeom>
-          <a:solidFill>
-            <a:srgbClr val="FFFF00"/>
-          </a:solidFill>
-          <a:ln>
-            <a:solidFill>
-              <a:srgbClr val="FFFF00"/>
-            </a:solidFill>
-          </a:ln>
-        </p:spPr>
-        <p:txBody>
-          <a:bodyPr wrap="square" rtlCol="0" anchor="ctr">
-            <a:spAutoFit/>
-          </a:bodyPr>
-          <a:lstStyle/>
-          <a:p>
-            <a:pPr algn="ctr"/>
-            <a:r>
-              <a:rPr lang="en-US" sz="2000" b="1" dirty="0">
-                <a:solidFill>
-                  <a:srgbClr val="FF0000"/>
-                </a:solidFill>
-              </a:rPr>
-              <a:t>HW #1</a:t>
-            </a:r>
-            <a:endParaRPr lang="en-US" sz="1600" b="1" dirty="0">
-              <a:solidFill>
-                <a:srgbClr val="FF0000"/>
-              </a:solidFill>
-            </a:endParaRPr>
           </a:p>
         </p:txBody>
       </p:sp>
@@ -26633,19 +25591,25 @@
           <p:nvPr/>
         </p:nvSpPr>
         <p:spPr>
-          <a:xfrm>
-            <a:off x="6096000" y="5480989"/>
-            <a:ext cx="1423939" cy="794802"/>
+          <a:xfrm rot="20486592">
+            <a:off x="5579480" y="4335862"/>
+            <a:ext cx="1294490" cy="611387"/>
           </a:xfrm>
           <a:prstGeom prst="leftArrow">
-            <a:avLst/>
+            <a:avLst>
+              <a:gd name="adj1" fmla="val 50000"/>
+              <a:gd name="adj2" fmla="val 46472"/>
+            </a:avLst>
           </a:prstGeom>
           <a:solidFill>
-            <a:srgbClr val="FFFF00"/>
+            <a:schemeClr val="accent4">
+              <a:lumMod val="20000"/>
+              <a:lumOff val="80000"/>
+            </a:schemeClr>
           </a:solidFill>
           <a:ln>
             <a:solidFill>
-              <a:srgbClr val="FFFF00"/>
+              <a:schemeClr val="tx1"/>
             </a:solidFill>
           </a:ln>
         </p:spPr>
@@ -26657,18 +25621,57 @@
           <a:p>
             <a:pPr algn="ctr"/>
             <a:r>
-              <a:rPr lang="en-US" sz="2000" b="1" dirty="0">
-                <a:solidFill>
-                  <a:srgbClr val="FF0000"/>
-                </a:solidFill>
-              </a:rPr>
+              <a:rPr lang="en-US" sz="1600" b="1" dirty="0"/>
+              <a:t>HW #1</a:t>
+            </a:r>
+            <a:endParaRPr lang="en-US" sz="1200" b="1" dirty="0"/>
+          </a:p>
+        </p:txBody>
+      </p:sp>
+      <p:sp>
+        <p:nvSpPr>
+          <p:cNvPr id="8" name="TextBox 7">
+            <a:extLst>
+              <a:ext uri="{FF2B5EF4-FFF2-40B4-BE49-F238E27FC236}">
+                <a16:creationId xmlns:a16="http://schemas.microsoft.com/office/drawing/2014/main" id="{AB5F3367-1990-E2F1-24CF-87290EA9D2DD}"/>
+              </a:ext>
+            </a:extLst>
+          </p:cNvPr>
+          <p:cNvSpPr txBox="1"/>
+          <p:nvPr/>
+        </p:nvSpPr>
+        <p:spPr>
+          <a:xfrm rot="904324">
+            <a:off x="5605658" y="5473061"/>
+            <a:ext cx="1294490" cy="555806"/>
+          </a:xfrm>
+          <a:prstGeom prst="leftArrow">
+            <a:avLst/>
+          </a:prstGeom>
+          <a:solidFill>
+            <a:schemeClr val="accent4">
+              <a:lumMod val="20000"/>
+              <a:lumOff val="80000"/>
+            </a:schemeClr>
+          </a:solidFill>
+          <a:ln>
+            <a:solidFill>
+              <a:schemeClr val="tx1"/>
+            </a:solidFill>
+          </a:ln>
+        </p:spPr>
+        <p:txBody>
+          <a:bodyPr wrap="square" rtlCol="0" anchor="ctr">
+            <a:spAutoFit/>
+          </a:bodyPr>
+          <a:lstStyle/>
+          <a:p>
+            <a:pPr algn="ctr"/>
+            <a:r>
+              <a:rPr lang="en-US" sz="1600" b="1" dirty="0"/>
               <a:t>HW #2</a:t>
             </a:r>
-            <a:endParaRPr lang="en-US" sz="1600" b="1" dirty="0">
-              <a:solidFill>
-                <a:srgbClr val="FF0000"/>
-              </a:solidFill>
-            </a:endParaRPr>
+            <a:endParaRPr lang="en-US" sz="1200" b="1" dirty="0"/>
           </a:p>
         </p:txBody>
       </p:sp>
@@ -26685,7 +25688,7 @@
 </p:sld>
 </file>
 
-<file path=ppt/slides/slide8.xml><?xml version="1.0" encoding="utf-8"?>
+<file path=ppt/slides/slide7.xml><?xml version="1.0" encoding="utf-8"?>
 <p:sld xmlns:a="http://schemas.openxmlformats.org/drawingml/2006/main" xmlns:r="http://schemas.openxmlformats.org/officeDocument/2006/relationships" xmlns:p="http://schemas.openxmlformats.org/presentationml/2006/main">
   <p:cSld>
     <p:spTree>
@@ -26943,58 +25946,6 @@
               <a:latin typeface="+mj-lt"/>
               <a:ea typeface="Calibri" panose="020F0502020204030204" pitchFamily="34" charset="0"/>
               <a:cs typeface="Times New Roman" panose="02020603050405020304" pitchFamily="18" charset="0"/>
-            </a:endParaRPr>
-          </a:p>
-        </p:txBody>
-      </p:sp>
-      <p:sp>
-        <p:nvSpPr>
-          <p:cNvPr id="4" name="TextBox 3">
-            <a:extLst>
-              <a:ext uri="{FF2B5EF4-FFF2-40B4-BE49-F238E27FC236}">
-                <a16:creationId xmlns:a16="http://schemas.microsoft.com/office/drawing/2014/main" id="{A3CB61AE-D4C0-BAB2-BAD3-9CB8C6CED763}"/>
-              </a:ext>
-            </a:extLst>
-          </p:cNvPr>
-          <p:cNvSpPr txBox="1"/>
-          <p:nvPr/>
-        </p:nvSpPr>
-        <p:spPr>
-          <a:xfrm>
-            <a:off x="7200304" y="2660964"/>
-            <a:ext cx="1423939" cy="597146"/>
-          </a:xfrm>
-          <a:prstGeom prst="leftArrow">
-            <a:avLst/>
-          </a:prstGeom>
-          <a:solidFill>
-            <a:srgbClr val="FFFF00"/>
-          </a:solidFill>
-          <a:ln>
-            <a:solidFill>
-              <a:srgbClr val="FFFF00"/>
-            </a:solidFill>
-          </a:ln>
-        </p:spPr>
-        <p:txBody>
-          <a:bodyPr wrap="square" rtlCol="0" anchor="ctr">
-            <a:spAutoFit/>
-          </a:bodyPr>
-          <a:lstStyle/>
-          <a:p>
-            <a:pPr algn="ctr"/>
-            <a:r>
-              <a:rPr lang="en-US" sz="2000" b="1" dirty="0">
-                <a:solidFill>
-                  <a:srgbClr val="FF0000"/>
-                </a:solidFill>
-              </a:rPr>
-              <a:t>HW #3</a:t>
-            </a:r>
-            <a:endParaRPr lang="en-US" sz="1600" b="1" dirty="0">
-              <a:solidFill>
-                <a:srgbClr val="FF0000"/>
-              </a:solidFill>
             </a:endParaRPr>
           </a:p>
         </p:txBody>
@@ -27355,11 +26306,14 @@
             <a:avLst/>
           </a:prstGeom>
           <a:solidFill>
-            <a:srgbClr val="FFFF00"/>
+            <a:schemeClr val="accent4">
+              <a:lumMod val="20000"/>
+              <a:lumOff val="80000"/>
+            </a:schemeClr>
           </a:solidFill>
           <a:ln>
             <a:solidFill>
-              <a:srgbClr val="FFFF00"/>
+              <a:schemeClr val="tx1"/>
             </a:solidFill>
           </a:ln>
         </p:spPr>
@@ -27371,18 +26325,57 @@
           <a:p>
             <a:pPr algn="ctr"/>
             <a:r>
-              <a:rPr lang="en-US" sz="2000" b="1" dirty="0">
-                <a:solidFill>
-                  <a:srgbClr val="FF0000"/>
-                </a:solidFill>
-              </a:rPr>
+              <a:rPr lang="en-US" sz="2000" b="1" dirty="0"/>
               <a:t>Special guests!</a:t>
             </a:r>
-            <a:endParaRPr lang="en-US" sz="1600" b="1" dirty="0">
-              <a:solidFill>
-                <a:srgbClr val="FF0000"/>
-              </a:solidFill>
-            </a:endParaRPr>
+            <a:endParaRPr lang="en-US" sz="1600" b="1" dirty="0"/>
+          </a:p>
+        </p:txBody>
+      </p:sp>
+      <p:sp>
+        <p:nvSpPr>
+          <p:cNvPr id="9" name="TextBox 8">
+            <a:extLst>
+              <a:ext uri="{FF2B5EF4-FFF2-40B4-BE49-F238E27FC236}">
+                <a16:creationId xmlns:a16="http://schemas.microsoft.com/office/drawing/2014/main" id="{AB2DC760-57B0-E7B1-A518-1E83243CC83A}"/>
+              </a:ext>
+            </a:extLst>
+          </p:cNvPr>
+          <p:cNvSpPr txBox="1"/>
+          <p:nvPr/>
+        </p:nvSpPr>
+        <p:spPr>
+          <a:xfrm rot="904324">
+            <a:off x="5350476" y="2841726"/>
+            <a:ext cx="1294490" cy="672525"/>
+          </a:xfrm>
+          <a:prstGeom prst="leftArrow">
+            <a:avLst/>
+          </a:prstGeom>
+          <a:solidFill>
+            <a:schemeClr val="accent4">
+              <a:lumMod val="20000"/>
+              <a:lumOff val="80000"/>
+            </a:schemeClr>
+          </a:solidFill>
+          <a:ln>
+            <a:solidFill>
+              <a:schemeClr val="tx1"/>
+            </a:solidFill>
+          </a:ln>
+        </p:spPr>
+        <p:txBody>
+          <a:bodyPr wrap="square" rtlCol="0" anchor="ctr">
+            <a:spAutoFit/>
+          </a:bodyPr>
+          <a:lstStyle/>
+          <a:p>
+            <a:pPr algn="ctr"/>
+            <a:r>
+              <a:rPr lang="en-US" sz="1600" b="1" dirty="0"/>
+              <a:t>HW #3</a:t>
+            </a:r>
+            <a:endParaRPr lang="en-US" sz="1200" b="1" dirty="0"/>
           </a:p>
         </p:txBody>
       </p:sp>
@@ -27399,7 +26392,7 @@
 </p:sld>
 </file>
 
-<file path=ppt/slides/slide9.xml><?xml version="1.0" encoding="utf-8"?>
+<file path=ppt/slides/slide8.xml><?xml version="1.0" encoding="utf-8"?>
 <p:sld xmlns:a="http://schemas.openxmlformats.org/drawingml/2006/main" xmlns:r="http://schemas.openxmlformats.org/officeDocument/2006/relationships" xmlns:p="http://schemas.openxmlformats.org/presentationml/2006/main">
   <p:cSld>
     <p:spTree>
@@ -27900,6 +26893,518 @@
 </p:sld>
 </file>
 
+<file path=ppt/slides/slide9.xml><?xml version="1.0" encoding="utf-8"?>
+<p:sld xmlns:a="http://schemas.openxmlformats.org/drawingml/2006/main" xmlns:r="http://schemas.openxmlformats.org/officeDocument/2006/relationships" xmlns:p="http://schemas.openxmlformats.org/presentationml/2006/main">
+  <p:cSld>
+    <p:spTree>
+      <p:nvGrpSpPr>
+        <p:cNvPr id="1" name=""/>
+        <p:cNvGrpSpPr/>
+        <p:nvPr/>
+      </p:nvGrpSpPr>
+      <p:grpSpPr>
+        <a:xfrm>
+          <a:off x="0" y="0"/>
+          <a:ext cx="0" cy="0"/>
+          <a:chOff x="0" y="0"/>
+          <a:chExt cx="0" cy="0"/>
+        </a:xfrm>
+      </p:grpSpPr>
+      <p:sp>
+        <p:nvSpPr>
+          <p:cNvPr id="2" name="Title 1">
+            <a:extLst>
+              <a:ext uri="{FF2B5EF4-FFF2-40B4-BE49-F238E27FC236}">
+                <a16:creationId xmlns:a16="http://schemas.microsoft.com/office/drawing/2014/main" id="{AB068364-15C5-3BF6-D48C-9F8A6AEE255B}"/>
+              </a:ext>
+            </a:extLst>
+          </p:cNvPr>
+          <p:cNvSpPr>
+            <a:spLocks noGrp="1"/>
+          </p:cNvSpPr>
+          <p:nvPr>
+            <p:ph type="title"/>
+          </p:nvPr>
+        </p:nvSpPr>
+        <p:spPr/>
+        <p:txBody>
+          <a:bodyPr/>
+          <a:lstStyle/>
+          <a:p>
+            <a:r>
+              <a:rPr lang="es-ES" dirty="0" err="1"/>
+              <a:t>Assessment</a:t>
+            </a:r>
+            <a:endParaRPr lang="en-US" dirty="0"/>
+          </a:p>
+        </p:txBody>
+      </p:sp>
+      <p:sp>
+        <p:nvSpPr>
+          <p:cNvPr id="3" name="Content Placeholder 2">
+            <a:extLst>
+              <a:ext uri="{FF2B5EF4-FFF2-40B4-BE49-F238E27FC236}">
+                <a16:creationId xmlns:a16="http://schemas.microsoft.com/office/drawing/2014/main" id="{74832070-BBD7-9FCA-BB9C-F3611835FF33}"/>
+              </a:ext>
+            </a:extLst>
+          </p:cNvPr>
+          <p:cNvSpPr>
+            <a:spLocks noGrp="1"/>
+          </p:cNvSpPr>
+          <p:nvPr>
+            <p:ph idx="1"/>
+          </p:nvPr>
+        </p:nvSpPr>
+        <p:spPr/>
+        <p:txBody>
+          <a:bodyPr/>
+          <a:lstStyle/>
+          <a:p>
+            <a:pPr>
+              <a:lnSpc>
+                <a:spcPct val="150000"/>
+              </a:lnSpc>
+              <a:buFont typeface="Wingdings" panose="05000000000000000000" pitchFamily="2" charset="2"/>
+              <a:buChar char="§"/>
+            </a:pPr>
+            <a:r>
+              <a:rPr lang="en-US" dirty="0">
+                <a:latin typeface="+mj-lt"/>
+              </a:rPr>
+              <a:t>Assignments, “groups” of 1-2 students: </a:t>
+            </a:r>
+            <a:r>
+              <a:rPr lang="en-US" b="1" dirty="0">
+                <a:latin typeface="+mj-lt"/>
+              </a:rPr>
+              <a:t>40%</a:t>
+            </a:r>
+          </a:p>
+          <a:p>
+            <a:pPr>
+              <a:lnSpc>
+                <a:spcPct val="150000"/>
+              </a:lnSpc>
+              <a:buFont typeface="Wingdings" panose="05000000000000000000" pitchFamily="2" charset="2"/>
+              <a:buChar char="§"/>
+            </a:pPr>
+            <a:r>
+              <a:rPr lang="en-US" dirty="0">
+                <a:latin typeface="+mj-lt"/>
+              </a:rPr>
+              <a:t>Final exam: </a:t>
+            </a:r>
+            <a:r>
+              <a:rPr lang="en-US" b="1" dirty="0">
+                <a:latin typeface="+mj-lt"/>
+              </a:rPr>
+              <a:t>60%</a:t>
+            </a:r>
+          </a:p>
+          <a:p>
+            <a:pPr>
+              <a:lnSpc>
+                <a:spcPct val="150000"/>
+              </a:lnSpc>
+              <a:buFont typeface="Wingdings" panose="05000000000000000000" pitchFamily="2" charset="2"/>
+              <a:buChar char="§"/>
+            </a:pPr>
+            <a:r>
+              <a:rPr lang="en-US" dirty="0">
+                <a:latin typeface="+mj-lt"/>
+              </a:rPr>
+              <a:t>Voluntary additional work: </a:t>
+            </a:r>
+            <a:r>
+              <a:rPr lang="en-US" b="1" dirty="0">
+                <a:latin typeface="+mj-lt"/>
+              </a:rPr>
+              <a:t>Bonus </a:t>
+            </a:r>
+            <a:r>
+              <a:rPr lang="en-US" dirty="0">
+                <a:latin typeface="+mj-lt"/>
+              </a:rPr>
+              <a:t>up to </a:t>
+            </a:r>
+            <a:r>
+              <a:rPr lang="en-US" b="1" dirty="0">
+                <a:latin typeface="+mj-lt"/>
+              </a:rPr>
+              <a:t>10%</a:t>
+            </a:r>
+            <a:r>
+              <a:rPr lang="en-US" dirty="0">
+                <a:latin typeface="+mj-lt"/>
+              </a:rPr>
+              <a:t>, additional to the final grade (if &gt; 5)</a:t>
+            </a:r>
+            <a:endParaRPr lang="en-US" b="1" dirty="0">
+              <a:latin typeface="+mj-lt"/>
+            </a:endParaRPr>
+          </a:p>
+          <a:p>
+            <a:pPr>
+              <a:lnSpc>
+                <a:spcPct val="150000"/>
+              </a:lnSpc>
+              <a:buFont typeface="Wingdings" panose="05000000000000000000" pitchFamily="2" charset="2"/>
+              <a:buChar char="§"/>
+            </a:pPr>
+            <a:endParaRPr lang="en-US" dirty="0">
+              <a:latin typeface="+mj-lt"/>
+            </a:endParaRPr>
+          </a:p>
+        </p:txBody>
+      </p:sp>
+      <p:sp>
+        <p:nvSpPr>
+          <p:cNvPr id="4" name="Rectángulo 3">
+            <a:extLst>
+              <a:ext uri="{FF2B5EF4-FFF2-40B4-BE49-F238E27FC236}">
+                <a16:creationId xmlns:a16="http://schemas.microsoft.com/office/drawing/2014/main" id="{DD58828A-4424-2064-0CAC-6F62F86F4321}"/>
+              </a:ext>
+            </a:extLst>
+          </p:cNvPr>
+          <p:cNvSpPr/>
+          <p:nvPr/>
+        </p:nvSpPr>
+        <p:spPr>
+          <a:xfrm>
+            <a:off x="0" y="0"/>
+            <a:ext cx="374469" cy="6858000"/>
+          </a:xfrm>
+          <a:prstGeom prst="rect">
+            <a:avLst/>
+          </a:prstGeom>
+        </p:spPr>
+        <p:style>
+          <a:lnRef idx="2">
+            <a:schemeClr val="accent2">
+              <a:shade val="50000"/>
+            </a:schemeClr>
+          </a:lnRef>
+          <a:fillRef idx="1">
+            <a:schemeClr val="accent2"/>
+          </a:fillRef>
+          <a:effectRef idx="0">
+            <a:schemeClr val="accent2"/>
+          </a:effectRef>
+          <a:fontRef idx="minor">
+            <a:schemeClr val="lt1"/>
+          </a:fontRef>
+        </p:style>
+        <p:txBody>
+          <a:bodyPr rtlCol="0" anchor="ctr"/>
+          <a:lstStyle/>
+          <a:p>
+            <a:pPr algn="ctr"/>
+            <a:endParaRPr lang="es-ES"/>
+          </a:p>
+        </p:txBody>
+      </p:sp>
+      <p:sp>
+        <p:nvSpPr>
+          <p:cNvPr id="5" name="Rectangle 143">
+            <a:extLst>
+              <a:ext uri="{FF2B5EF4-FFF2-40B4-BE49-F238E27FC236}">
+                <a16:creationId xmlns:a16="http://schemas.microsoft.com/office/drawing/2014/main" id="{B205DE6C-9F4E-6354-37BC-6FC313F527B6}"/>
+              </a:ext>
+            </a:extLst>
+          </p:cNvPr>
+          <p:cNvSpPr>
+            <a:spLocks noChangeArrowheads="1"/>
+          </p:cNvSpPr>
+          <p:nvPr/>
+        </p:nvSpPr>
+        <p:spPr bwMode="auto">
+          <a:xfrm>
+            <a:off x="448342" y="6401243"/>
+            <a:ext cx="5730175" cy="307777"/>
+          </a:xfrm>
+          <a:prstGeom prst="rect">
+            <a:avLst/>
+          </a:prstGeom>
+          <a:noFill/>
+          <a:ln>
+            <a:noFill/>
+          </a:ln>
+          <a:effectLst/>
+          <a:extLst>
+            <a:ext uri="{909E8E84-426E-40DD-AFC4-6F175D3DCCD1}">
+              <a14:hiddenFill xmlns:a14="http://schemas.microsoft.com/office/drawing/2010/main">
+                <a:solidFill>
+                  <a:schemeClr val="accent1"/>
+                </a:solidFill>
+              </a14:hiddenFill>
+            </a:ext>
+            <a:ext uri="{91240B29-F687-4F45-9708-019B960494DF}">
+              <a14:hiddenLine xmlns:a14="http://schemas.microsoft.com/office/drawing/2010/main" w="9525">
+                <a:solidFill>
+                  <a:schemeClr val="tx1"/>
+                </a:solidFill>
+                <a:miter lim="800000"/>
+                <a:headEnd/>
+                <a:tailEnd/>
+              </a14:hiddenLine>
+            </a:ext>
+            <a:ext uri="{AF507438-7753-43E0-B8FC-AC1667EBCBE1}">
+              <a14:hiddenEffects xmlns:a14="http://schemas.microsoft.com/office/drawing/2010/main">
+                <a:effectLst>
+                  <a:outerShdw dist="35921" dir="2700000" algn="ctr" rotWithShape="0">
+                    <a:schemeClr val="bg2"/>
+                  </a:outerShdw>
+                </a:effectLst>
+              </a14:hiddenEffects>
+            </a:ext>
+          </a:extLst>
+        </p:spPr>
+        <p:txBody>
+          <a:bodyPr vert="horz" wrap="square" lIns="91440" tIns="45720" rIns="91440" bIns="45720" numCol="1" anchor="ctr" anchorCtr="0" compatLnSpc="1">
+            <a:prstTxWarp prst="textNoShape">
+              <a:avLst/>
+            </a:prstTxWarp>
+            <a:spAutoFit/>
+          </a:bodyPr>
+          <a:lstStyle/>
+          <a:p>
+            <a:pPr marL="0" marR="0" lvl="0" indent="0" algn="l" defTabSz="914400" rtl="0" eaLnBrk="0" fontAlgn="base" latinLnBrk="0" hangingPunct="0">
+              <a:lnSpc>
+                <a:spcPct val="100000"/>
+              </a:lnSpc>
+              <a:spcBef>
+                <a:spcPct val="0"/>
+              </a:spcBef>
+              <a:spcAft>
+                <a:spcPct val="0"/>
+              </a:spcAft>
+              <a:buClrTx/>
+              <a:buSzTx/>
+              <a:buFontTx/>
+              <a:buNone/>
+              <a:tabLst/>
+            </a:pPr>
+            <a:r>
+              <a:rPr kumimoji="0" lang="en-US" altLang="es-ES" sz="1400" b="0" i="0" u="none" strike="noStrike" cap="none" normalizeH="0" baseline="0" dirty="0">
+                <a:ln>
+                  <a:noFill/>
+                </a:ln>
+                <a:solidFill>
+                  <a:srgbClr val="F4A200"/>
+                </a:solidFill>
+                <a:effectLst/>
+                <a:latin typeface="Arial" panose="020B0604020202020204" pitchFamily="34" charset="0"/>
+                <a:ea typeface="Myriad Pro Light"/>
+                <a:cs typeface="Times New Roman" panose="02020603050405020304" pitchFamily="18" charset="0"/>
+              </a:rPr>
+              <a:t>Master in Quantitative Economic Analysis </a:t>
+            </a:r>
+            <a:r>
+              <a:rPr kumimoji="0" lang="en-US" altLang="es-ES" sz="1400" b="0" i="0" u="none" strike="noStrike" cap="none" normalizeH="0" baseline="0" dirty="0" err="1">
+                <a:ln>
+                  <a:noFill/>
+                </a:ln>
+                <a:solidFill>
+                  <a:srgbClr val="F4A200"/>
+                </a:solidFill>
+                <a:effectLst/>
+                <a:latin typeface="Arial" panose="020B0604020202020204" pitchFamily="34" charset="0"/>
+                <a:ea typeface="Myriad Pro Light"/>
+                <a:cs typeface="Times New Roman" panose="02020603050405020304" pitchFamily="18" charset="0"/>
+              </a:rPr>
+              <a:t>MQuEA</a:t>
+            </a:r>
+            <a:endParaRPr kumimoji="0" lang="es-ES" altLang="es-ES" sz="500" b="0" i="0" u="none" strike="noStrike" cap="none" normalizeH="0" baseline="0" dirty="0">
+              <a:ln>
+                <a:noFill/>
+              </a:ln>
+              <a:solidFill>
+                <a:schemeClr val="tx1"/>
+              </a:solidFill>
+              <a:effectLst/>
+              <a:latin typeface="Arial" panose="020B0604020202020204" pitchFamily="34" charset="0"/>
+            </a:endParaRPr>
+          </a:p>
+        </p:txBody>
+      </p:sp>
+      <p:sp>
+        <p:nvSpPr>
+          <p:cNvPr id="6" name="Rectangle 143">
+            <a:extLst>
+              <a:ext uri="{FF2B5EF4-FFF2-40B4-BE49-F238E27FC236}">
+                <a16:creationId xmlns:a16="http://schemas.microsoft.com/office/drawing/2014/main" id="{F65B34BA-9730-D5C3-DE85-65860FBF231D}"/>
+              </a:ext>
+            </a:extLst>
+          </p:cNvPr>
+          <p:cNvSpPr>
+            <a:spLocks noChangeArrowheads="1"/>
+          </p:cNvSpPr>
+          <p:nvPr/>
+        </p:nvSpPr>
+        <p:spPr bwMode="auto">
+          <a:xfrm>
+            <a:off x="6186394" y="6411881"/>
+            <a:ext cx="5730175" cy="307777"/>
+          </a:xfrm>
+          <a:prstGeom prst="rect">
+            <a:avLst/>
+          </a:prstGeom>
+          <a:noFill/>
+          <a:ln>
+            <a:noFill/>
+          </a:ln>
+          <a:effectLst/>
+          <a:extLst>
+            <a:ext uri="{909E8E84-426E-40DD-AFC4-6F175D3DCCD1}">
+              <a14:hiddenFill xmlns:a14="http://schemas.microsoft.com/office/drawing/2010/main">
+                <a:solidFill>
+                  <a:schemeClr val="accent1"/>
+                </a:solidFill>
+              </a14:hiddenFill>
+            </a:ext>
+            <a:ext uri="{91240B29-F687-4F45-9708-019B960494DF}">
+              <a14:hiddenLine xmlns:a14="http://schemas.microsoft.com/office/drawing/2010/main" w="9525">
+                <a:solidFill>
+                  <a:schemeClr val="tx1"/>
+                </a:solidFill>
+                <a:miter lim="800000"/>
+                <a:headEnd/>
+                <a:tailEnd/>
+              </a14:hiddenLine>
+            </a:ext>
+            <a:ext uri="{AF507438-7753-43E0-B8FC-AC1667EBCBE1}">
+              <a14:hiddenEffects xmlns:a14="http://schemas.microsoft.com/office/drawing/2010/main">
+                <a:effectLst>
+                  <a:outerShdw dist="35921" dir="2700000" algn="ctr" rotWithShape="0">
+                    <a:schemeClr val="bg2"/>
+                  </a:outerShdw>
+                </a:effectLst>
+              </a14:hiddenEffects>
+            </a:ext>
+          </a:extLst>
+        </p:spPr>
+        <p:txBody>
+          <a:bodyPr vert="horz" wrap="square" lIns="91440" tIns="45720" rIns="91440" bIns="45720" numCol="1" anchor="ctr" anchorCtr="0" compatLnSpc="1">
+            <a:prstTxWarp prst="textNoShape">
+              <a:avLst/>
+            </a:prstTxWarp>
+            <a:spAutoFit/>
+          </a:bodyPr>
+          <a:lstStyle/>
+          <a:p>
+            <a:pPr marL="0" marR="0" lvl="0" indent="0" algn="r" defTabSz="914400" rtl="0" eaLnBrk="0" fontAlgn="base" latinLnBrk="0" hangingPunct="0">
+              <a:lnSpc>
+                <a:spcPct val="100000"/>
+              </a:lnSpc>
+              <a:spcBef>
+                <a:spcPct val="0"/>
+              </a:spcBef>
+              <a:spcAft>
+                <a:spcPct val="0"/>
+              </a:spcAft>
+              <a:buClrTx/>
+              <a:buSzTx/>
+              <a:buFontTx/>
+              <a:buNone/>
+              <a:tabLst/>
+            </a:pPr>
+            <a:r>
+              <a:rPr kumimoji="0" lang="en-US" altLang="es-ES" sz="1400" b="0" i="0" u="none" strike="noStrike" cap="none" normalizeH="0" baseline="0" dirty="0">
+                <a:ln>
+                  <a:noFill/>
+                </a:ln>
+                <a:solidFill>
+                  <a:srgbClr val="F4A200"/>
+                </a:solidFill>
+                <a:effectLst/>
+                <a:latin typeface="Arial" panose="020B0604020202020204" pitchFamily="34" charset="0"/>
+                <a:ea typeface="Myriad Pro Light"/>
+                <a:cs typeface="Times New Roman" panose="02020603050405020304" pitchFamily="18" charset="0"/>
+              </a:rPr>
+              <a:t>Universidad </a:t>
+            </a:r>
+            <a:r>
+              <a:rPr kumimoji="0" lang="en-US" altLang="es-ES" sz="1400" b="0" i="0" u="none" strike="noStrike" cap="none" normalizeH="0" baseline="0" dirty="0" err="1">
+                <a:ln>
+                  <a:noFill/>
+                </a:ln>
+                <a:solidFill>
+                  <a:srgbClr val="F4A200"/>
+                </a:solidFill>
+                <a:effectLst/>
+                <a:latin typeface="Arial" panose="020B0604020202020204" pitchFamily="34" charset="0"/>
+                <a:ea typeface="Myriad Pro Light"/>
+                <a:cs typeface="Times New Roman" panose="02020603050405020304" pitchFamily="18" charset="0"/>
+              </a:rPr>
+              <a:t>Aut</a:t>
+            </a:r>
+            <a:r>
+              <a:rPr lang="en-US" altLang="es-ES" sz="1400" dirty="0" err="1">
+                <a:solidFill>
+                  <a:srgbClr val="F4A200"/>
+                </a:solidFill>
+                <a:latin typeface="Arial" panose="020B0604020202020204" pitchFamily="34" charset="0"/>
+                <a:ea typeface="Myriad Pro Light"/>
+                <a:cs typeface="Times New Roman" panose="02020603050405020304" pitchFamily="18" charset="0"/>
+              </a:rPr>
+              <a:t>ó</a:t>
+            </a:r>
+            <a:r>
+              <a:rPr kumimoji="0" lang="en-US" altLang="es-ES" sz="1400" b="0" i="0" u="none" strike="noStrike" cap="none" normalizeH="0" baseline="0" dirty="0" err="1">
+                <a:ln>
+                  <a:noFill/>
+                </a:ln>
+                <a:solidFill>
+                  <a:srgbClr val="F4A200"/>
+                </a:solidFill>
+                <a:effectLst/>
+                <a:latin typeface="Arial" panose="020B0604020202020204" pitchFamily="34" charset="0"/>
+                <a:ea typeface="Myriad Pro Light"/>
+                <a:cs typeface="Times New Roman" panose="02020603050405020304" pitchFamily="18" charset="0"/>
+              </a:rPr>
+              <a:t>noma</a:t>
+            </a:r>
+            <a:r>
+              <a:rPr kumimoji="0" lang="en-US" altLang="es-ES" sz="1400" b="0" i="0" u="none" strike="noStrike" cap="none" normalizeH="0" baseline="0" dirty="0">
+                <a:ln>
+                  <a:noFill/>
+                </a:ln>
+                <a:solidFill>
+                  <a:srgbClr val="F4A200"/>
+                </a:solidFill>
+                <a:effectLst/>
+                <a:latin typeface="Arial" panose="020B0604020202020204" pitchFamily="34" charset="0"/>
+                <a:ea typeface="Myriad Pro Light"/>
+                <a:cs typeface="Times New Roman" panose="02020603050405020304" pitchFamily="18" charset="0"/>
+              </a:rPr>
+              <a:t> de Madrid</a:t>
+            </a:r>
+            <a:endParaRPr kumimoji="0" lang="es-ES" altLang="es-ES" sz="500" b="0" i="0" u="none" strike="noStrike" cap="none" normalizeH="0" baseline="0" dirty="0">
+              <a:ln>
+                <a:noFill/>
+              </a:ln>
+              <a:solidFill>
+                <a:schemeClr val="tx1"/>
+              </a:solidFill>
+              <a:effectLst/>
+              <a:latin typeface="Arial" panose="020B0604020202020204" pitchFamily="34" charset="0"/>
+            </a:endParaRPr>
+          </a:p>
+        </p:txBody>
+      </p:sp>
+    </p:spTree>
+    <p:extLst>
+      <p:ext uri="{BB962C8B-B14F-4D97-AF65-F5344CB8AC3E}">
+        <p14:creationId xmlns:p14="http://schemas.microsoft.com/office/powerpoint/2010/main" val="3307144704"/>
+      </p:ext>
+    </p:extLst>
+  </p:cSld>
+  <p:clrMapOvr>
+    <a:masterClrMapping/>
+  </p:clrMapOvr>
+</p:sld>
+</file>
+
 <file path=ppt/theme/theme1.xml><?xml version="1.0" encoding="utf-8"?>
 <a:theme xmlns:a="http://schemas.openxmlformats.org/drawingml/2006/main" name="Office Theme">
   <a:themeElements>

--- a/Course content/Slides/Topic 0 - Course presentation.pptx
+++ b/Course content/Slides/Topic 0 - Course presentation.pptx
@@ -135,7 +135,7 @@
 <file path=ppt/revisionInfo.xml><?xml version="1.0" encoding="utf-8"?>
 <p1510:revInfo xmlns:a="http://schemas.openxmlformats.org/drawingml/2006/main" xmlns:r="http://schemas.openxmlformats.org/officeDocument/2006/relationships" xmlns:p1510="http://schemas.microsoft.com/office/powerpoint/2015/10/main">
   <p1510:revLst>
-    <p1510:client id="{57F76B3A-18DC-491F-9F9A-8895FF154D34}" v="2" dt="2023-10-19T12:38:02.595"/>
+    <p1510:client id="{0466B1B0-99FA-44CC-AA85-49172B9FC6AE}" v="1" dt="2024-10-19T16:54:36.750"/>
   </p1510:revLst>
 </p1510:revInfo>
 </file>
@@ -255,6 +255,115 @@
           <pc:docMk/>
           <pc:sldMk cId="1134463671" sldId="268"/>
         </pc:sldMkLst>
+      </pc:sldChg>
+    </pc:docChg>
+  </pc:docChgLst>
+  <pc:docChgLst>
+    <pc:chgData name="Javier Bas Vicente" userId="96bf8a96-3310-496c-8c7e-8a087f977faa" providerId="ADAL" clId="{0466B1B0-99FA-44CC-AA85-49172B9FC6AE}"/>
+    <pc:docChg chg="custSel modSld">
+      <pc:chgData name="Javier Bas Vicente" userId="96bf8a96-3310-496c-8c7e-8a087f977faa" providerId="ADAL" clId="{0466B1B0-99FA-44CC-AA85-49172B9FC6AE}" dt="2024-10-19T16:56:10.950" v="278" actId="20577"/>
+      <pc:docMkLst>
+        <pc:docMk/>
+      </pc:docMkLst>
+      <pc:sldChg chg="delSp modSp mod">
+        <pc:chgData name="Javier Bas Vicente" userId="96bf8a96-3310-496c-8c7e-8a087f977faa" providerId="ADAL" clId="{0466B1B0-99FA-44CC-AA85-49172B9FC6AE}" dt="2024-10-19T16:55:06.541" v="113" actId="21"/>
+        <pc:sldMkLst>
+          <pc:docMk/>
+          <pc:sldMk cId="1427119661" sldId="260"/>
+        </pc:sldMkLst>
+        <pc:spChg chg="mod">
+          <ac:chgData name="Javier Bas Vicente" userId="96bf8a96-3310-496c-8c7e-8a087f977faa" providerId="ADAL" clId="{0466B1B0-99FA-44CC-AA85-49172B9FC6AE}" dt="2024-10-19T16:55:06.541" v="113" actId="21"/>
+          <ac:spMkLst>
+            <pc:docMk/>
+            <pc:sldMk cId="1427119661" sldId="260"/>
+            <ac:spMk id="3" creationId="{13C5A222-61CF-976C-B57F-058020CD77DA}"/>
+          </ac:spMkLst>
+        </pc:spChg>
+        <pc:spChg chg="del mod">
+          <ac:chgData name="Javier Bas Vicente" userId="96bf8a96-3310-496c-8c7e-8a087f977faa" providerId="ADAL" clId="{0466B1B0-99FA-44CC-AA85-49172B9FC6AE}" dt="2024-10-19T16:54:26.053" v="107" actId="21"/>
+          <ac:spMkLst>
+            <pc:docMk/>
+            <pc:sldMk cId="1427119661" sldId="260"/>
+            <ac:spMk id="8" creationId="{AB5F3367-1990-E2F1-24CF-87290EA9D2DD}"/>
+          </ac:spMkLst>
+        </pc:spChg>
+        <pc:spChg chg="mod">
+          <ac:chgData name="Javier Bas Vicente" userId="96bf8a96-3310-496c-8c7e-8a087f977faa" providerId="ADAL" clId="{0466B1B0-99FA-44CC-AA85-49172B9FC6AE}" dt="2024-10-19T16:54:18.932" v="106" actId="1076"/>
+          <ac:spMkLst>
+            <pc:docMk/>
+            <pc:sldMk cId="1427119661" sldId="260"/>
+            <ac:spMk id="9" creationId="{97F27C87-1881-2242-DB08-E64B0E501A02}"/>
+          </ac:spMkLst>
+        </pc:spChg>
+      </pc:sldChg>
+      <pc:sldChg chg="modSp mod">
+        <pc:chgData name="Javier Bas Vicente" userId="96bf8a96-3310-496c-8c7e-8a087f977faa" providerId="ADAL" clId="{0466B1B0-99FA-44CC-AA85-49172B9FC6AE}" dt="2024-10-19T16:56:10.950" v="278" actId="20577"/>
+        <pc:sldMkLst>
+          <pc:docMk/>
+          <pc:sldMk cId="3307144704" sldId="263"/>
+        </pc:sldMkLst>
+        <pc:spChg chg="mod">
+          <ac:chgData name="Javier Bas Vicente" userId="96bf8a96-3310-496c-8c7e-8a087f977faa" providerId="ADAL" clId="{0466B1B0-99FA-44CC-AA85-49172B9FC6AE}" dt="2024-10-19T16:56:10.950" v="278" actId="20577"/>
+          <ac:spMkLst>
+            <pc:docMk/>
+            <pc:sldMk cId="3307144704" sldId="263"/>
+            <ac:spMk id="3" creationId="{74832070-BBD7-9FCA-BB9C-F3611835FF33}"/>
+          </ac:spMkLst>
+        </pc:spChg>
+      </pc:sldChg>
+      <pc:sldChg chg="addSp delSp modSp mod">
+        <pc:chgData name="Javier Bas Vicente" userId="96bf8a96-3310-496c-8c7e-8a087f977faa" providerId="ADAL" clId="{0466B1B0-99FA-44CC-AA85-49172B9FC6AE}" dt="2024-10-19T16:55:50.607" v="260" actId="1036"/>
+        <pc:sldMkLst>
+          <pc:docMk/>
+          <pc:sldMk cId="3889292457" sldId="265"/>
+        </pc:sldMkLst>
+        <pc:spChg chg="mod">
+          <ac:chgData name="Javier Bas Vicente" userId="96bf8a96-3310-496c-8c7e-8a087f977faa" providerId="ADAL" clId="{0466B1B0-99FA-44CC-AA85-49172B9FC6AE}" dt="2024-10-19T16:55:32.809" v="136" actId="12"/>
+          <ac:spMkLst>
+            <pc:docMk/>
+            <pc:sldMk cId="3889292457" sldId="265"/>
+            <ac:spMk id="3" creationId="{13C5A222-61CF-976C-B57F-058020CD77DA}"/>
+          </ac:spMkLst>
+        </pc:spChg>
+        <pc:spChg chg="add mod">
+          <ac:chgData name="Javier Bas Vicente" userId="96bf8a96-3310-496c-8c7e-8a087f977faa" providerId="ADAL" clId="{0466B1B0-99FA-44CC-AA85-49172B9FC6AE}" dt="2024-10-19T16:54:44.799" v="112" actId="1076"/>
+          <ac:spMkLst>
+            <pc:docMk/>
+            <pc:sldMk cId="3889292457" sldId="265"/>
+            <ac:spMk id="4" creationId="{AB5F3367-1990-E2F1-24CF-87290EA9D2DD}"/>
+          </ac:spMkLst>
+        </pc:spChg>
+        <pc:spChg chg="mod">
+          <ac:chgData name="Javier Bas Vicente" userId="96bf8a96-3310-496c-8c7e-8a087f977faa" providerId="ADAL" clId="{0466B1B0-99FA-44CC-AA85-49172B9FC6AE}" dt="2024-10-19T16:55:50.607" v="260" actId="1036"/>
+          <ac:spMkLst>
+            <pc:docMk/>
+            <pc:sldMk cId="3889292457" sldId="265"/>
+            <ac:spMk id="8" creationId="{4B9D467B-EAAF-5EFB-E9D7-B976C5A570C7}"/>
+          </ac:spMkLst>
+        </pc:spChg>
+        <pc:spChg chg="del">
+          <ac:chgData name="Javier Bas Vicente" userId="96bf8a96-3310-496c-8c7e-8a087f977faa" providerId="ADAL" clId="{0466B1B0-99FA-44CC-AA85-49172B9FC6AE}" dt="2024-10-19T16:54:35.918" v="108" actId="478"/>
+          <ac:spMkLst>
+            <pc:docMk/>
+            <pc:sldMk cId="3889292457" sldId="265"/>
+            <ac:spMk id="9" creationId="{AB2DC760-57B0-E7B1-A518-1E83243CC83A}"/>
+          </ac:spMkLst>
+        </pc:spChg>
+      </pc:sldChg>
+      <pc:sldChg chg="modSp mod">
+        <pc:chgData name="Javier Bas Vicente" userId="96bf8a96-3310-496c-8c7e-8a087f977faa" providerId="ADAL" clId="{0466B1B0-99FA-44CC-AA85-49172B9FC6AE}" dt="2024-10-19T16:53:05.845" v="5" actId="20577"/>
+        <pc:sldMkLst>
+          <pc:docMk/>
+          <pc:sldMk cId="2149080833" sldId="266"/>
+        </pc:sldMkLst>
+        <pc:spChg chg="mod">
+          <ac:chgData name="Javier Bas Vicente" userId="96bf8a96-3310-496c-8c7e-8a087f977faa" providerId="ADAL" clId="{0466B1B0-99FA-44CC-AA85-49172B9FC6AE}" dt="2024-10-19T16:53:05.845" v="5" actId="20577"/>
+          <ac:spMkLst>
+            <pc:docMk/>
+            <pc:sldMk cId="2149080833" sldId="266"/>
+            <ac:spMk id="3" creationId="{6866AA87-E000-52D2-F65D-4B414B00BBE5}"/>
+          </ac:spMkLst>
+        </pc:spChg>
       </pc:sldChg>
     </pc:docChg>
   </pc:docChgLst>
@@ -408,7 +517,7 @@
           <a:p>
             <a:fld id="{A7DB5662-7327-465C-9A70-AD96B7A8D67A}" type="datetimeFigureOut">
               <a:rPr lang="en-US" smtClean="0"/>
-              <a:t>10/19/2023</a:t>
+              <a:t>10/19/2024</a:t>
             </a:fld>
             <a:endParaRPr lang="en-US"/>
           </a:p>
@@ -606,7 +715,7 @@
           <a:p>
             <a:fld id="{A7DB5662-7327-465C-9A70-AD96B7A8D67A}" type="datetimeFigureOut">
               <a:rPr lang="en-US" smtClean="0"/>
-              <a:t>10/19/2023</a:t>
+              <a:t>10/19/2024</a:t>
             </a:fld>
             <a:endParaRPr lang="en-US"/>
           </a:p>
@@ -814,7 +923,7 @@
           <a:p>
             <a:fld id="{A7DB5662-7327-465C-9A70-AD96B7A8D67A}" type="datetimeFigureOut">
               <a:rPr lang="en-US" smtClean="0"/>
-              <a:t>10/19/2023</a:t>
+              <a:t>10/19/2024</a:t>
             </a:fld>
             <a:endParaRPr lang="en-US"/>
           </a:p>
@@ -1012,7 +1121,7 @@
           <a:p>
             <a:fld id="{A7DB5662-7327-465C-9A70-AD96B7A8D67A}" type="datetimeFigureOut">
               <a:rPr lang="en-US" smtClean="0"/>
-              <a:t>10/19/2023</a:t>
+              <a:t>10/19/2024</a:t>
             </a:fld>
             <a:endParaRPr lang="en-US"/>
           </a:p>
@@ -1287,7 +1396,7 @@
           <a:p>
             <a:fld id="{A7DB5662-7327-465C-9A70-AD96B7A8D67A}" type="datetimeFigureOut">
               <a:rPr lang="en-US" smtClean="0"/>
-              <a:t>10/19/2023</a:t>
+              <a:t>10/19/2024</a:t>
             </a:fld>
             <a:endParaRPr lang="en-US"/>
           </a:p>
@@ -1552,7 +1661,7 @@
           <a:p>
             <a:fld id="{A7DB5662-7327-465C-9A70-AD96B7A8D67A}" type="datetimeFigureOut">
               <a:rPr lang="en-US" smtClean="0"/>
-              <a:t>10/19/2023</a:t>
+              <a:t>10/19/2024</a:t>
             </a:fld>
             <a:endParaRPr lang="en-US"/>
           </a:p>
@@ -1964,7 +2073,7 @@
           <a:p>
             <a:fld id="{A7DB5662-7327-465C-9A70-AD96B7A8D67A}" type="datetimeFigureOut">
               <a:rPr lang="en-US" smtClean="0"/>
-              <a:t>10/19/2023</a:t>
+              <a:t>10/19/2024</a:t>
             </a:fld>
             <a:endParaRPr lang="en-US"/>
           </a:p>
@@ -2105,7 +2214,7 @@
           <a:p>
             <a:fld id="{A7DB5662-7327-465C-9A70-AD96B7A8D67A}" type="datetimeFigureOut">
               <a:rPr lang="en-US" smtClean="0"/>
-              <a:t>10/19/2023</a:t>
+              <a:t>10/19/2024</a:t>
             </a:fld>
             <a:endParaRPr lang="en-US"/>
           </a:p>
@@ -2218,7 +2327,7 @@
           <a:p>
             <a:fld id="{A7DB5662-7327-465C-9A70-AD96B7A8D67A}" type="datetimeFigureOut">
               <a:rPr lang="en-US" smtClean="0"/>
-              <a:t>10/19/2023</a:t>
+              <a:t>10/19/2024</a:t>
             </a:fld>
             <a:endParaRPr lang="en-US"/>
           </a:p>
@@ -2529,7 +2638,7 @@
           <a:p>
             <a:fld id="{A7DB5662-7327-465C-9A70-AD96B7A8D67A}" type="datetimeFigureOut">
               <a:rPr lang="en-US" smtClean="0"/>
-              <a:t>10/19/2023</a:t>
+              <a:t>10/19/2024</a:t>
             </a:fld>
             <a:endParaRPr lang="en-US"/>
           </a:p>
@@ -2817,7 +2926,7 @@
           <a:p>
             <a:fld id="{A7DB5662-7327-465C-9A70-AD96B7A8D67A}" type="datetimeFigureOut">
               <a:rPr lang="en-US" smtClean="0"/>
-              <a:t>10/19/2023</a:t>
+              <a:t>10/19/2024</a:t>
             </a:fld>
             <a:endParaRPr lang="en-US"/>
           </a:p>
@@ -3058,7 +3167,7 @@
           <a:p>
             <a:fld id="{A7DB5662-7327-465C-9A70-AD96B7A8D67A}" type="datetimeFigureOut">
               <a:rPr lang="en-US" smtClean="0"/>
-              <a:t>10/19/2023</a:t>
+              <a:t>10/19/2024</a:t>
             </a:fld>
             <a:endParaRPr lang="en-US"/>
           </a:p>
@@ -3594,14 +3703,7 @@
             </a:r>
           </a:p>
           <a:p>
-            <a:r>
-              <a:rPr lang="es-ES" sz="2000" dirty="0">
-                <a:latin typeface="+mj-lt"/>
-                <a:cs typeface="Times New Roman" panose="02020603050405020304" pitchFamily="18" charset="0"/>
-              </a:rPr>
-              <a:t>2023/2024</a:t>
-            </a:r>
-            <a:endParaRPr lang="en-US" sz="2000" dirty="0">
+            <a:endParaRPr lang="es-ES" sz="2000" dirty="0">
               <a:latin typeface="+mj-lt"/>
               <a:cs typeface="Times New Roman" panose="02020603050405020304" pitchFamily="18" charset="0"/>
             </a:endParaRPr>
@@ -25218,29 +25320,6 @@
               <a:t>Topic 5 – Tree-based Methods (HO Ch. 6 &amp; 7)</a:t>
             </a:r>
           </a:p>
-          <a:p>
-            <a:pPr marL="0" marR="0" indent="0">
-              <a:lnSpc>
-                <a:spcPct val="107000"/>
-              </a:lnSpc>
-              <a:spcBef>
-                <a:spcPts val="0"/>
-              </a:spcBef>
-              <a:spcAft>
-                <a:spcPts val="800"/>
-              </a:spcAft>
-              <a:buNone/>
-            </a:pPr>
-            <a:r>
-              <a:rPr lang="en-US" sz="2000" dirty="0">
-                <a:effectLst/>
-                <a:latin typeface="+mj-lt"/>
-                <a:ea typeface="Calibri" panose="020F0502020204030204" pitchFamily="34" charset="0"/>
-                <a:cs typeface="Times New Roman" panose="02020603050405020304" pitchFamily="18" charset="0"/>
-              </a:rPr>
-              <a:t>Topic 6 – Neural Networks (HO Ch. 10) </a:t>
-            </a:r>
-          </a:p>
         </p:txBody>
       </p:sp>
       <p:sp>
@@ -25591,9 +25670,9 @@
           <p:nvPr/>
         </p:nvSpPr>
         <p:spPr>
-          <a:xfrm rot="20486592">
-            <a:off x="5579480" y="4335862"/>
-            <a:ext cx="1294490" cy="611387"/>
+          <a:xfrm>
+            <a:off x="5443686" y="5479625"/>
+            <a:ext cx="1895263" cy="434692"/>
           </a:xfrm>
           <a:prstGeom prst="leftArrow">
             <a:avLst>
@@ -25622,54 +25701,7 @@
             <a:pPr algn="ctr"/>
             <a:r>
               <a:rPr lang="en-US" sz="1600" b="1" dirty="0"/>
-              <a:t>HW #1</a:t>
-            </a:r>
-            <a:endParaRPr lang="en-US" sz="1200" b="1" dirty="0"/>
-          </a:p>
-        </p:txBody>
-      </p:sp>
-      <p:sp>
-        <p:nvSpPr>
-          <p:cNvPr id="8" name="TextBox 7">
-            <a:extLst>
-              <a:ext uri="{FF2B5EF4-FFF2-40B4-BE49-F238E27FC236}">
-                <a16:creationId xmlns:a16="http://schemas.microsoft.com/office/drawing/2014/main" id="{AB5F3367-1990-E2F1-24CF-87290EA9D2DD}"/>
-              </a:ext>
-            </a:extLst>
-          </p:cNvPr>
-          <p:cNvSpPr txBox="1"/>
-          <p:nvPr/>
-        </p:nvSpPr>
-        <p:spPr>
-          <a:xfrm rot="904324">
-            <a:off x="5605658" y="5473061"/>
-            <a:ext cx="1294490" cy="555806"/>
-          </a:xfrm>
-          <a:prstGeom prst="leftArrow">
-            <a:avLst/>
-          </a:prstGeom>
-          <a:solidFill>
-            <a:schemeClr val="accent4">
-              <a:lumMod val="20000"/>
-              <a:lumOff val="80000"/>
-            </a:schemeClr>
-          </a:solidFill>
-          <a:ln>
-            <a:solidFill>
-              <a:schemeClr val="tx1"/>
-            </a:solidFill>
-          </a:ln>
-        </p:spPr>
-        <p:txBody>
-          <a:bodyPr wrap="square" rtlCol="0" anchor="ctr">
-            <a:spAutoFit/>
-          </a:bodyPr>
-          <a:lstStyle/>
-          <a:p>
-            <a:pPr algn="ctr"/>
-            <a:r>
-              <a:rPr lang="en-US" sz="1600" b="1" dirty="0"/>
-              <a:t>HW #2</a:t>
+              <a:t>Lab session #1</a:t>
             </a:r>
             <a:endParaRPr lang="en-US" sz="1200" b="1" dirty="0"/>
           </a:p>
@@ -25881,31 +25913,7 @@
             </a:r>
           </a:p>
           <a:p>
-            <a:pPr marL="342900" marR="0" lvl="0" indent="-342900">
-              <a:lnSpc>
-                <a:spcPct val="107000"/>
-              </a:lnSpc>
-              <a:spcBef>
-                <a:spcPts val="0"/>
-              </a:spcBef>
-              <a:spcAft>
-                <a:spcPts val="0"/>
-              </a:spcAft>
-              <a:buFont typeface="Calibri" panose="020F0502020204030204" pitchFamily="34" charset="0"/>
-              <a:buChar char="-"/>
-            </a:pPr>
-            <a:r>
-              <a:rPr lang="en-US" sz="2000" dirty="0">
-                <a:effectLst/>
-                <a:latin typeface="+mj-lt"/>
-                <a:ea typeface="Calibri" panose="020F0502020204030204" pitchFamily="34" charset="0"/>
-                <a:cs typeface="Times New Roman" panose="02020603050405020304" pitchFamily="18" charset="0"/>
-              </a:rPr>
-              <a:t>Deep Computer Vision Using Convolutional Neural Networks?</a:t>
-            </a:r>
-          </a:p>
-          <a:p>
-            <a:pPr marL="342900" marR="0" lvl="0" indent="-342900">
+            <a:pPr marR="0">
               <a:lnSpc>
                 <a:spcPct val="107000"/>
               </a:lnSpc>
@@ -25915,8 +25923,6 @@
               <a:spcAft>
                 <a:spcPts val="800"/>
               </a:spcAft>
-              <a:buFont typeface="Calibri" panose="020F0502020204030204" pitchFamily="34" charset="0"/>
-              <a:buChar char="-"/>
             </a:pPr>
             <a:r>
               <a:rPr lang="en-US" sz="2000" dirty="0">
@@ -25925,11 +25931,16 @@
                 <a:ea typeface="Calibri" panose="020F0502020204030204" pitchFamily="34" charset="0"/>
                 <a:cs typeface="Times New Roman" panose="02020603050405020304" pitchFamily="18" charset="0"/>
               </a:rPr>
-              <a:t>Natural Language Processing?</a:t>
+              <a:t>Topic 6 – Neural Networks (HO Ch. 10) </a:t>
             </a:r>
+            <a:endParaRPr lang="en-US" sz="2000" dirty="0">
+              <a:latin typeface="+mj-lt"/>
+              <a:ea typeface="Calibri" panose="020F0502020204030204" pitchFamily="34" charset="0"/>
+              <a:cs typeface="Times New Roman" panose="02020603050405020304" pitchFamily="18" charset="0"/>
+            </a:endParaRPr>
           </a:p>
           <a:p>
-            <a:pPr marL="0" marR="0" indent="0">
+            <a:pPr marR="0">
               <a:lnSpc>
                 <a:spcPct val="107000"/>
               </a:lnSpc>
@@ -25939,8 +25950,65 @@
               <a:spcAft>
                 <a:spcPts val="800"/>
               </a:spcAft>
-              <a:buNone/>
             </a:pPr>
+            <a:r>
+              <a:rPr lang="en-US" sz="2000" dirty="0" err="1">
+                <a:effectLst/>
+                <a:latin typeface="+mj-lt"/>
+                <a:ea typeface="Calibri" panose="020F0502020204030204" pitchFamily="34" charset="0"/>
+                <a:cs typeface="Times New Roman" panose="02020603050405020304" pitchFamily="18" charset="0"/>
+              </a:rPr>
+              <a:t>Nommon</a:t>
+            </a:r>
+            <a:endParaRPr lang="en-US" sz="2000" dirty="0">
+              <a:effectLst/>
+              <a:latin typeface="+mj-lt"/>
+              <a:ea typeface="Calibri" panose="020F0502020204030204" pitchFamily="34" charset="0"/>
+              <a:cs typeface="Times New Roman" panose="02020603050405020304" pitchFamily="18" charset="0"/>
+            </a:endParaRPr>
+          </a:p>
+          <a:p>
+            <a:pPr marR="0">
+              <a:lnSpc>
+                <a:spcPct val="107000"/>
+              </a:lnSpc>
+              <a:spcBef>
+                <a:spcPts val="0"/>
+              </a:spcBef>
+              <a:spcAft>
+                <a:spcPts val="800"/>
+              </a:spcAft>
+            </a:pPr>
+            <a:r>
+              <a:rPr lang="en-US" sz="2000" dirty="0">
+                <a:latin typeface="+mj-lt"/>
+                <a:ea typeface="Calibri" panose="020F0502020204030204" pitchFamily="34" charset="0"/>
+                <a:cs typeface="Times New Roman" panose="02020603050405020304" pitchFamily="18" charset="0"/>
+              </a:rPr>
+              <a:t>TBA</a:t>
+            </a:r>
+          </a:p>
+          <a:p>
+            <a:pPr marR="0">
+              <a:lnSpc>
+                <a:spcPct val="107000"/>
+              </a:lnSpc>
+              <a:spcBef>
+                <a:spcPts val="0"/>
+              </a:spcBef>
+              <a:spcAft>
+                <a:spcPts val="800"/>
+              </a:spcAft>
+            </a:pPr>
+            <a:r>
+              <a:rPr lang="en-US" sz="2000" dirty="0" err="1">
+                <a:effectLst/>
+                <a:latin typeface="+mj-lt"/>
+                <a:ea typeface="Calibri" panose="020F0502020204030204" pitchFamily="34" charset="0"/>
+                <a:cs typeface="Times New Roman" panose="02020603050405020304" pitchFamily="18" charset="0"/>
+              </a:rPr>
+              <a:t>IAGen</a:t>
+            </a:r>
             <a:endParaRPr lang="en-US" sz="2000" dirty="0">
               <a:effectLst/>
               <a:latin typeface="+mj-lt"/>
@@ -26299,8 +26367,8 @@
         </p:nvSpPr>
         <p:spPr>
           <a:xfrm>
-            <a:off x="7912273" y="3703783"/>
-            <a:ext cx="1423939" cy="1406188"/>
+            <a:off x="2247240" y="4458055"/>
+            <a:ext cx="2293268" cy="793756"/>
           </a:xfrm>
           <a:prstGeom prst="leftArrow">
             <a:avLst/>
@@ -26334,10 +26402,10 @@
       </p:sp>
       <p:sp>
         <p:nvSpPr>
-          <p:cNvPr id="9" name="TextBox 8">
+          <p:cNvPr id="4" name="TextBox 3">
             <a:extLst>
               <a:ext uri="{FF2B5EF4-FFF2-40B4-BE49-F238E27FC236}">
-                <a16:creationId xmlns:a16="http://schemas.microsoft.com/office/drawing/2014/main" id="{AB2DC760-57B0-E7B1-A518-1E83243CC83A}"/>
+                <a16:creationId xmlns:a16="http://schemas.microsoft.com/office/drawing/2014/main" id="{AB5F3367-1990-E2F1-24CF-87290EA9D2DD}"/>
               </a:ext>
             </a:extLst>
           </p:cNvPr>
@@ -26345,9 +26413,9 @@
           <p:nvPr/>
         </p:nvSpPr>
         <p:spPr>
-          <a:xfrm rot="904324">
-            <a:off x="5350476" y="2841726"/>
-            <a:ext cx="1294490" cy="672525"/>
+          <a:xfrm>
+            <a:off x="5153676" y="2698979"/>
+            <a:ext cx="1722966" cy="434692"/>
           </a:xfrm>
           <a:prstGeom prst="leftArrow">
             <a:avLst/>
@@ -26373,7 +26441,7 @@
             <a:pPr algn="ctr"/>
             <a:r>
               <a:rPr lang="en-US" sz="1600" b="1" dirty="0"/>
-              <a:t>HW #3</a:t>
+              <a:t>Lab session #2</a:t>
             </a:r>
             <a:endParaRPr lang="en-US" sz="1200" b="1" dirty="0"/>
           </a:p>
@@ -26971,13 +27039,13 @@
               <a:rPr lang="en-US" dirty="0">
                 <a:latin typeface="+mj-lt"/>
               </a:rPr>
-              <a:t>Assignments, “groups” of 1-2 students: </a:t>
+              <a:t>Course Project, “groups” of 1-2 students: 5</a:t>
             </a:r>
             <a:r>
               <a:rPr lang="en-US" b="1" dirty="0">
                 <a:latin typeface="+mj-lt"/>
               </a:rPr>
-              <a:t>40%</a:t>
+              <a:t>0%</a:t>
             </a:r>
           </a:p>
           <a:p>
@@ -26998,7 +27066,7 @@
               <a:rPr lang="en-US" b="1" dirty="0">
                 <a:latin typeface="+mj-lt"/>
               </a:rPr>
-              <a:t>60%</a:t>
+              <a:t>50%</a:t>
             </a:r>
           </a:p>
           <a:p>
